--- a/10-Knowledge-Products/KP1-GEA/videos/module_3/en/decks/KP1_M3_3.7_Deck_v0.2.pptx
+++ b/10-Knowledge-Products/KP1-GEA/videos/module_3/en/decks/KP1_M3_3.7_Deck_v0.2.pptx
@@ -14,15 +14,15 @@
     <p:handoutMasterId r:id="rId47"/>
   </p:handoutMasterIdLst>
   <p:sldIdLst>
-    <p:sldId id="2681" r:id="rId8"/>
-    <p:sldId id="2741" r:id="rId63"/>
-    <p:sldId id="2742" r:id="rId64"/>
-    <p:sldId id="2743" r:id="rId65"/>
-    <p:sldId id="2744" r:id="rId66"/>
-    <p:sldId id="2745" r:id="rId67"/>
-    <p:sldId id="2746" r:id="rId68"/>
     <p:sldId id="2747" r:id="rId69"/>
     <p:sldId id="2748" r:id="rId70"/>
+    <p:sldId id="2749" r:id="rId71"/>
+    <p:sldId id="2750" r:id="rId72"/>
+    <p:sldId id="2751" r:id="rId73"/>
+    <p:sldId id="2752" r:id="rId74"/>
+    <p:sldId id="2753" r:id="rId75"/>
+    <p:sldId id="2754" r:id="rId76"/>
+    <p:sldId id="2755" r:id="rId77"/>
   </p:sldIdLst>
   <p:sldSz cx="12192000" cy="6858000"/>
   <p:notesSz cx="6858000" cy="9144000"/>
@@ -889,502 +889,6 @@
 </p:notesMaster>
 </file>
 
-<file path=ppt/notesSlides/notesSlide21.xml><?xml version="1.0" encoding="utf-8"?>
-<p:notes xmlns:a="http://schemas.openxmlformats.org/drawingml/2006/main" xmlns:p="http://schemas.openxmlformats.org/presentationml/2006/main" xmlns:r="http://schemas.openxmlformats.org/officeDocument/2006/relationships">
-  <p:cSld>
-    <p:spTree>
-      <p:nvGrpSpPr>
-        <p:cNvPr id="1" name=""/>
-        <p:cNvGrpSpPr/>
-        <p:nvPr/>
-      </p:nvGrpSpPr>
-      <p:grpSpPr>
-        <a:xfrm>
-          <a:off x="0" y="0"/>
-          <a:ext cx="0" cy="0"/>
-          <a:chOff x="0" y="0"/>
-          <a:chExt cx="0" cy="0"/>
-        </a:xfrm>
-      </p:grpSpPr>
-      <p:sp>
-        <p:nvSpPr>
-          <p:cNvPr id="2" name="Slide Image Placeholder 1"/>
-          <p:cNvSpPr>
-            <a:spLocks noGrp="1"/>
-          </p:cNvSpPr>
-          <p:nvPr>
-            <p:ph type="sldImg" idx="2"/>
-          </p:nvPr>
-        </p:nvSpPr>
-        <p:spPr/>
-      </p:sp>
-      <p:sp>
-        <p:nvSpPr>
-          <p:cNvPr id="3" name="Notes Placeholder 2"/>
-          <p:cNvSpPr>
-            <a:spLocks noGrp="1"/>
-          </p:cNvSpPr>
-          <p:nvPr>
-            <p:ph type="body" idx="3" sz="quarter"/>
-          </p:nvPr>
-        </p:nvSpPr>
-        <p:spPr/>
-        <p:txBody>
-          <a:bodyPr/>
-          <a:lstStyle/>
-          <a:p>
-            <a:r>
-              <a:t>Title card for standalone video 3.7. Content slides are identical to the corresponding section of the combined deck KP1_M3_Deck_v0.2.pptx; voice-over is in each slide’s notes.</a:t>
-            </a:r>
-          </a:p>
-        </p:txBody>
-      </p:sp>
-      <p:sp>
-        <p:nvSpPr>
-          <p:cNvPr id="4" name="Slide Number Placeholder 3"/>
-          <p:cNvSpPr>
-            <a:spLocks noGrp="1"/>
-          </p:cNvSpPr>
-          <p:nvPr>
-            <p:ph type="sldNum" idx="5" sz="quarter"/>
-          </p:nvPr>
-        </p:nvSpPr>
-        <p:spPr/>
-      </p:sp>
-    </p:spTree>
-  </p:cSld>
-  <p:clrMapOvr>
-    <a:masterClrMapping/>
-  </p:clrMapOvr>
-</p:notes>
-</file>
-
-<file path=ppt/notesSlides/notesSlide48.xml><?xml version="1.0" encoding="utf-8"?>
-<p:notes xmlns:a="http://schemas.openxmlformats.org/drawingml/2006/main" xmlns:p="http://schemas.openxmlformats.org/presentationml/2006/main" xmlns:r="http://schemas.openxmlformats.org/officeDocument/2006/relationships">
-  <p:cSld>
-    <p:spTree>
-      <p:nvGrpSpPr>
-        <p:cNvPr id="1" name=""/>
-        <p:cNvGrpSpPr/>
-        <p:nvPr/>
-      </p:nvGrpSpPr>
-      <p:grpSpPr>
-        <a:xfrm>
-          <a:off x="0" y="0"/>
-          <a:ext cx="0" cy="0"/>
-          <a:chOff x="0" y="0"/>
-          <a:chExt cx="0" cy="0"/>
-        </a:xfrm>
-      </p:grpSpPr>
-      <p:sp>
-        <p:nvSpPr>
-          <p:cNvPr id="2" name="Slide Image Placeholder 1"/>
-          <p:cNvSpPr>
-            <a:spLocks noGrp="1"/>
-          </p:cNvSpPr>
-          <p:nvPr>
-            <p:ph type="sldImg" idx="2"/>
-          </p:nvPr>
-        </p:nvSpPr>
-        <p:spPr/>
-      </p:sp>
-      <p:sp>
-        <p:nvSpPr>
-          <p:cNvPr id="3" name="Notes Placeholder 2"/>
-          <p:cNvSpPr>
-            <a:spLocks noGrp="1"/>
-          </p:cNvSpPr>
-          <p:nvPr>
-            <p:ph type="body" idx="3" sz="quarter"/>
-          </p:nvPr>
-        </p:nvSpPr>
-        <p:spPr/>
-        <p:txBody>
-          <a:bodyPr/>
-          <a:lstStyle/>
-          <a:p>
-            <a:r>
-              <a:t>VO, slide 1: Most EA programmes do not fail dramatically. They fade. The first six months go well; then, somewhere in the second year, the practice quietly stops mattering. The fade is predictable, and it comes in four forms.</a:t>
-            </a:r>
-          </a:p>
-          <a:p/>
-          <a:p>
-            <a:r>
-              <a:t>RETRIEVAL MOMENT: before the first fade slide, ask the viewer to name the ways they have seen a programme fade. The four answers are delivered on the next four slides, one each.</a:t>
-            </a:r>
-          </a:p>
-        </p:txBody>
-      </p:sp>
-      <p:sp>
-        <p:nvSpPr>
-          <p:cNvPr id="4" name="Slide Number Placeholder 3"/>
-          <p:cNvSpPr>
-            <a:spLocks noGrp="1"/>
-          </p:cNvSpPr>
-          <p:nvPr>
-            <p:ph type="sldNum" idx="5" sz="quarter"/>
-          </p:nvPr>
-        </p:nvSpPr>
-        <p:spPr/>
-      </p:sp>
-    </p:spTree>
-  </p:cSld>
-  <p:clrMapOvr>
-    <a:masterClrMapping/>
-  </p:clrMapOvr>
-</p:notes>
-</file>
-
-<file path=ppt/notesSlides/notesSlide49.xml><?xml version="1.0" encoding="utf-8"?>
-<p:notes xmlns:a="http://schemas.openxmlformats.org/drawingml/2006/main" xmlns:p="http://schemas.openxmlformats.org/presentationml/2006/main" xmlns:r="http://schemas.openxmlformats.org/officeDocument/2006/relationships">
-  <p:cSld>
-    <p:spTree>
-      <p:nvGrpSpPr>
-        <p:cNvPr id="1" name=""/>
-        <p:cNvGrpSpPr/>
-        <p:nvPr/>
-      </p:nvGrpSpPr>
-      <p:grpSpPr>
-        <a:xfrm>
-          <a:off x="0" y="0"/>
-          <a:ext cx="0" cy="0"/>
-          <a:chOff x="0" y="0"/>
-          <a:chExt cx="0" cy="0"/>
-        </a:xfrm>
-      </p:grpSpPr>
-      <p:sp>
-        <p:nvSpPr>
-          <p:cNvPr id="2" name="Slide Image Placeholder 1"/>
-          <p:cNvSpPr>
-            <a:spLocks noGrp="1"/>
-          </p:cNvSpPr>
-          <p:nvPr>
-            <p:ph type="sldImg" idx="2"/>
-          </p:nvPr>
-        </p:nvSpPr>
-        <p:spPr/>
-      </p:sp>
-      <p:sp>
-        <p:nvSpPr>
-          <p:cNvPr id="3" name="Notes Placeholder 2"/>
-          <p:cNvSpPr>
-            <a:spLocks noGrp="1"/>
-          </p:cNvSpPr>
-          <p:nvPr>
-            <p:ph type="body" idx="3" sz="quarter"/>
-          </p:nvPr>
-        </p:nvSpPr>
-        <p:spPr/>
-        <p:txBody>
-          <a:bodyPr/>
-          <a:lstStyle/>
-          <a:p>
-            <a:r>
-              <a:t>VO: The first fade: the team gets pulled away. A flagship programme runs into trouble and needs skilled people. Your architects are the obvious choice. They are seconded just for a few months, and the architecture work stops. This is the most common way EA programmes die. The counter is a protection promise — an explicit, written commitment that the EA team will not be pulled onto the urgent project of the week — and it must be recommitted whenever the minister or the sponsor changes, because the new one never feels bound by the old one's promise.</a:t>
-            </a:r>
-          </a:p>
-        </p:txBody>
-      </p:sp>
-      <p:sp>
-        <p:nvSpPr>
-          <p:cNvPr id="4" name="Slide Number Placeholder 3"/>
-          <p:cNvSpPr>
-            <a:spLocks noGrp="1"/>
-          </p:cNvSpPr>
-          <p:nvPr>
-            <p:ph type="sldNum" idx="5" sz="quarter"/>
-          </p:nvPr>
-        </p:nvSpPr>
-        <p:spPr/>
-      </p:sp>
-    </p:spTree>
-  </p:cSld>
-  <p:clrMapOvr>
-    <a:masterClrMapping/>
-  </p:clrMapOvr>
-</p:notes>
-</file>
-
-<file path=ppt/notesSlides/notesSlide50.xml><?xml version="1.0" encoding="utf-8"?>
-<p:notes xmlns:a="http://schemas.openxmlformats.org/drawingml/2006/main" xmlns:p="http://schemas.openxmlformats.org/presentationml/2006/main" xmlns:r="http://schemas.openxmlformats.org/officeDocument/2006/relationships">
-  <p:cSld>
-    <p:spTree>
-      <p:nvGrpSpPr>
-        <p:cNvPr id="1" name=""/>
-        <p:cNvGrpSpPr/>
-        <p:nvPr/>
-      </p:nvGrpSpPr>
-      <p:grpSpPr>
-        <a:xfrm>
-          <a:off x="0" y="0"/>
-          <a:ext cx="0" cy="0"/>
-          <a:chOff x="0" y="0"/>
-          <a:chExt cx="0" cy="0"/>
-        </a:xfrm>
-      </p:grpSpPr>
-      <p:sp>
-        <p:nvSpPr>
-          <p:cNvPr id="2" name="Slide Image Placeholder 1"/>
-          <p:cNvSpPr>
-            <a:spLocks noGrp="1"/>
-          </p:cNvSpPr>
-          <p:nvPr>
-            <p:ph type="sldImg" idx="2"/>
-          </p:nvPr>
-        </p:nvSpPr>
-        <p:spPr/>
-      </p:sp>
-      <p:sp>
-        <p:nvSpPr>
-          <p:cNvPr id="3" name="Notes Placeholder 2"/>
-          <p:cNvSpPr>
-            <a:spLocks noGrp="1"/>
-          </p:cNvSpPr>
-          <p:nvPr>
-            <p:ph type="body" idx="3" sz="quarter"/>
-          </p:nvPr>
-        </p:nvSpPr>
-        <p:spPr/>
-        <p:txBody>
-          <a:bodyPr/>
-          <a:lstStyle/>
-          <a:p>
-            <a:r>
-              <a:t>VO: The second fade: the repository goes stale. Updates slip during a busy quarter. The picture drifts from reality. Someone relies on it, gets burned, and word spreads that the repository cannot be trusted. Once trust goes, people stop using it, and an unused repository is a dead one. The counter is the update discipline — one named owner accountable for currency, updates tied to real events and to the review gate, so the repository stays true as a by-product of work that happens anyway.</a:t>
-            </a:r>
-          </a:p>
-        </p:txBody>
-      </p:sp>
-      <p:sp>
-        <p:nvSpPr>
-          <p:cNvPr id="4" name="Slide Number Placeholder 3"/>
-          <p:cNvSpPr>
-            <a:spLocks noGrp="1"/>
-          </p:cNvSpPr>
-          <p:nvPr>
-            <p:ph type="sldNum" idx="5" sz="quarter"/>
-          </p:nvPr>
-        </p:nvSpPr>
-        <p:spPr/>
-      </p:sp>
-    </p:spTree>
-  </p:cSld>
-  <p:clrMapOvr>
-    <a:masterClrMapping/>
-  </p:clrMapOvr>
-</p:notes>
-</file>
-
-<file path=ppt/notesSlides/notesSlide51.xml><?xml version="1.0" encoding="utf-8"?>
-<p:notes xmlns:a="http://schemas.openxmlformats.org/drawingml/2006/main" xmlns:p="http://schemas.openxmlformats.org/presentationml/2006/main" xmlns:r="http://schemas.openxmlformats.org/officeDocument/2006/relationships">
-  <p:cSld>
-    <p:spTree>
-      <p:nvGrpSpPr>
-        <p:cNvPr id="1" name=""/>
-        <p:cNvGrpSpPr/>
-        <p:nvPr/>
-      </p:nvGrpSpPr>
-      <p:grpSpPr>
-        <a:xfrm>
-          <a:off x="0" y="0"/>
-          <a:ext cx="0" cy="0"/>
-          <a:chOff x="0" y="0"/>
-          <a:chExt cx="0" cy="0"/>
-        </a:xfrm>
-      </p:grpSpPr>
-      <p:sp>
-        <p:nvSpPr>
-          <p:cNvPr id="2" name="Slide Image Placeholder 1"/>
-          <p:cNvSpPr>
-            <a:spLocks noGrp="1"/>
-          </p:cNvSpPr>
-          <p:nvPr>
-            <p:ph type="sldImg" idx="2"/>
-          </p:nvPr>
-        </p:nvSpPr>
-        <p:spPr/>
-      </p:sp>
-      <p:sp>
-        <p:nvSpPr>
-          <p:cNvPr id="3" name="Notes Placeholder 2"/>
-          <p:cNvSpPr>
-            <a:spLocks noGrp="1"/>
-          </p:cNvSpPr>
-          <p:nvPr>
-            <p:ph type="body" idx="3" sz="quarter"/>
-          </p:nvPr>
-        </p:nvSpPr>
-        <p:spPr/>
-        <p:txBody>
-          <a:bodyPr/>
-          <a:lstStyle/>
-          <a:p>
-            <a:r>
-              <a:t>VO: The third fade: the Board drifts back to advisory. Under delivery pressure, a powerful project is let through despite the Board's objection. Then another. The Board's no quietly becomes a suggestion, projects learn they can route around it, and within a year it is a discussion group again. The counter is to protect the binding authority deliberately — and to track and report every time the Board is overruled. Sunlight on overrides is what keeps the authority real; a Board overruled in silence is a Board being dismantled.</a:t>
-            </a:r>
-          </a:p>
-        </p:txBody>
-      </p:sp>
-      <p:sp>
-        <p:nvSpPr>
-          <p:cNvPr id="4" name="Slide Number Placeholder 3"/>
-          <p:cNvSpPr>
-            <a:spLocks noGrp="1"/>
-          </p:cNvSpPr>
-          <p:nvPr>
-            <p:ph type="sldNum" idx="5" sz="quarter"/>
-          </p:nvPr>
-        </p:nvSpPr>
-        <p:spPr/>
-      </p:sp>
-    </p:spTree>
-  </p:cSld>
-  <p:clrMapOvr>
-    <a:masterClrMapping/>
-  </p:clrMapOvr>
-</p:notes>
-</file>
-
-<file path=ppt/notesSlides/notesSlide52.xml><?xml version="1.0" encoding="utf-8"?>
-<p:notes xmlns:a="http://schemas.openxmlformats.org/drawingml/2006/main" xmlns:p="http://schemas.openxmlformats.org/presentationml/2006/main" xmlns:r="http://schemas.openxmlformats.org/officeDocument/2006/relationships">
-  <p:cSld>
-    <p:spTree>
-      <p:nvGrpSpPr>
-        <p:cNvPr id="1" name=""/>
-        <p:cNvGrpSpPr/>
-        <p:nvPr/>
-      </p:nvGrpSpPr>
-      <p:grpSpPr>
-        <a:xfrm>
-          <a:off x="0" y="0"/>
-          <a:ext cx="0" cy="0"/>
-          <a:chOff x="0" y="0"/>
-          <a:chExt cx="0" cy="0"/>
-        </a:xfrm>
-      </p:grpSpPr>
-      <p:sp>
-        <p:nvSpPr>
-          <p:cNvPr id="2" name="Slide Image Placeholder 1"/>
-          <p:cNvSpPr>
-            <a:spLocks noGrp="1"/>
-          </p:cNvSpPr>
-          <p:nvPr>
-            <p:ph type="sldImg" idx="2"/>
-          </p:nvPr>
-        </p:nvSpPr>
-        <p:spPr/>
-      </p:sp>
-      <p:sp>
-        <p:nvSpPr>
-          <p:cNvPr id="3" name="Notes Placeholder 2"/>
-          <p:cNvSpPr>
-            <a:spLocks noGrp="1"/>
-          </p:cNvSpPr>
-          <p:nvPr>
-            <p:ph type="body" idx="3" sz="quarter"/>
-          </p:nvPr>
-        </p:nvSpPr>
-        <p:spPr/>
-        <p:txBody>
-          <a:bodyPr/>
-          <a:lstStyle/>
-          <a:p>
-            <a:r>
-              <a:t>VO: The fourth fade: the sponsor changes. The minister or the digitalisation officer who championed the EA moves on. The successor has their own priorities and no attachment to this one. The counter is to make the EA outlive its sponsor — institutionalise it. A legal mandate for the Board, not just a memo. A budget line, not an annual favour. And the one-page scorecard, so a new sponsor can see in five minutes that the EA is returning its cost. An EA that depends on one champion dies with that champion's tenure. One that is institutionalised survives the handover.</a:t>
-            </a:r>
-          </a:p>
-        </p:txBody>
-      </p:sp>
-      <p:sp>
-        <p:nvSpPr>
-          <p:cNvPr id="4" name="Slide Number Placeholder 3"/>
-          <p:cNvSpPr>
-            <a:spLocks noGrp="1"/>
-          </p:cNvSpPr>
-          <p:nvPr>
-            <p:ph type="sldNum" idx="5" sz="quarter"/>
-          </p:nvPr>
-        </p:nvSpPr>
-        <p:spPr/>
-      </p:sp>
-    </p:spTree>
-  </p:cSld>
-  <p:clrMapOvr>
-    <a:masterClrMapping/>
-  </p:clrMapOvr>
-</p:notes>
-</file>
-
-<file path=ppt/notesSlides/notesSlide53.xml><?xml version="1.0" encoding="utf-8"?>
-<p:notes xmlns:a="http://schemas.openxmlformats.org/drawingml/2006/main" xmlns:p="http://schemas.openxmlformats.org/presentationml/2006/main" xmlns:r="http://schemas.openxmlformats.org/officeDocument/2006/relationships">
-  <p:cSld>
-    <p:spTree>
-      <p:nvGrpSpPr>
-        <p:cNvPr id="1" name=""/>
-        <p:cNvGrpSpPr/>
-        <p:nvPr/>
-      </p:nvGrpSpPr>
-      <p:grpSpPr>
-        <a:xfrm>
-          <a:off x="0" y="0"/>
-          <a:ext cx="0" cy="0"/>
-          <a:chOff x="0" y="0"/>
-          <a:chExt cx="0" cy="0"/>
-        </a:xfrm>
-      </p:grpSpPr>
-      <p:sp>
-        <p:nvSpPr>
-          <p:cNvPr id="2" name="Slide Image Placeholder 1"/>
-          <p:cNvSpPr>
-            <a:spLocks noGrp="1"/>
-          </p:cNvSpPr>
-          <p:nvPr>
-            <p:ph type="sldImg" idx="2"/>
-          </p:nvPr>
-        </p:nvSpPr>
-        <p:spPr/>
-      </p:sp>
-      <p:sp>
-        <p:nvSpPr>
-          <p:cNvPr id="3" name="Notes Placeholder 2"/>
-          <p:cNvSpPr>
-            <a:spLocks noGrp="1"/>
-          </p:cNvSpPr>
-          <p:nvPr>
-            <p:ph type="body" idx="3" sz="quarter"/>
-          </p:nvPr>
-        </p:nvSpPr>
-        <p:spPr/>
-        <p:txBody>
-          <a:bodyPr/>
-          <a:lstStyle/>
-          <a:p>
-            <a:r>
-              <a:t>VO: One honest thing to carry. A mature EA practice takes about five years. The architect who stands it up is rarely the one who sees it mature. That is not a reason for discouragement — it is the job. You are building something designed to outlast you: a repository that stays true without you, a Board that holds without you, a mandate that survives the next election. Build it to survive you, and you have done the work. Build it to depend on you, and it fades the moment you leave.</a:t>
-            </a:r>
-          </a:p>
-        </p:txBody>
-      </p:sp>
-      <p:sp>
-        <p:nvSpPr>
-          <p:cNvPr id="4" name="Slide Number Placeholder 3"/>
-          <p:cNvSpPr>
-            <a:spLocks noGrp="1"/>
-          </p:cNvSpPr>
-          <p:nvPr>
-            <p:ph type="sldNum" idx="5" sz="quarter"/>
-          </p:nvPr>
-        </p:nvSpPr>
-        <p:spPr/>
-      </p:sp>
-    </p:spTree>
-  </p:cSld>
-  <p:clrMapOvr>
-    <a:masterClrMapping/>
-  </p:clrMapOvr>
-</p:notes>
-</file>
-
 <file path=ppt/notesSlides/notesSlide54.xml><?xml version="1.0" encoding="utf-8"?>
 <p:notes xmlns:a="http://schemas.openxmlformats.org/drawingml/2006/main" xmlns:p="http://schemas.openxmlformats.org/presentationml/2006/main" xmlns:r="http://schemas.openxmlformats.org/officeDocument/2006/relationships">
   <p:cSld>
@@ -1430,13 +934,7 @@
           <a:lstStyle/>
           <a:p>
             <a:r>
-              <a:t>PRACTICE BOX (on-screen only — never read it, never paraphrase it, never point at it). It replaces the narrated handoff: this video ends on the recap and the Sources slide.</a:t>
-            </a:r>
-          </a:p>
-          <a:p/>
-          <a:p>
-            <a:r>
-              <a:t>VO: Watch for the four fades — the team pulled, the repository stale, the Board gone advisory, the sponsor changed — and counter each. Keep the practice alive past year two, and the architecture becomes how government works.</a:t>
+              <a:t>Title card — the cold open. The hosts name the module, the video number, the title and the single message on this slide; no scripted narration. Hold until the opener begins; the opener is narrated on the next slide.</a:t>
             </a:r>
           </a:p>
         </p:txBody>
@@ -1462,6 +960,508 @@
 </file>
 
 <file path=ppt/notesSlides/notesSlide55.xml><?xml version="1.0" encoding="utf-8"?>
+<p:notes xmlns:a="http://schemas.openxmlformats.org/drawingml/2006/main" xmlns:p="http://schemas.openxmlformats.org/presentationml/2006/main" xmlns:r="http://schemas.openxmlformats.org/officeDocument/2006/relationships">
+  <p:cSld>
+    <p:spTree>
+      <p:nvGrpSpPr>
+        <p:cNvPr id="1" name=""/>
+        <p:cNvGrpSpPr/>
+        <p:nvPr/>
+      </p:nvGrpSpPr>
+      <p:grpSpPr>
+        <a:xfrm>
+          <a:off x="0" y="0"/>
+          <a:ext cx="0" cy="0"/>
+          <a:chOff x="0" y="0"/>
+          <a:chExt cx="0" cy="0"/>
+        </a:xfrm>
+      </p:grpSpPr>
+      <p:sp>
+        <p:nvSpPr>
+          <p:cNvPr id="2" name="Slide Image Placeholder 1"/>
+          <p:cNvSpPr>
+            <a:spLocks noGrp="1"/>
+          </p:cNvSpPr>
+          <p:nvPr>
+            <p:ph type="sldImg" idx="2"/>
+          </p:nvPr>
+        </p:nvSpPr>
+        <p:spPr/>
+      </p:sp>
+      <p:sp>
+        <p:nvSpPr>
+          <p:cNvPr id="3" name="Notes Placeholder 2"/>
+          <p:cNvSpPr>
+            <a:spLocks noGrp="1"/>
+          </p:cNvSpPr>
+          <p:nvPr>
+            <p:ph type="body" idx="3" sz="quarter"/>
+          </p:nvPr>
+        </p:nvSpPr>
+        <p:spPr/>
+        <p:txBody>
+          <a:bodyPr/>
+          <a:lstStyle/>
+          <a:p>
+            <a:r>
+              <a:t>VO: Most EA programmes do not fail dramatically. They fade. The first six months go well; then, somewhere in the second year, the practice quietly stops mattering. The fade is predictable, and it comes in four forms.</a:t>
+            </a:r>
+          </a:p>
+          <a:p/>
+          <a:p>
+            <a:r>
+              <a:t>RETRIEVAL MOMENT: before the first fade slide, ask the viewer to name the ways they have seen a programme fade. The four answers are delivered on the next four slides, one each.</a:t>
+            </a:r>
+          </a:p>
+        </p:txBody>
+      </p:sp>
+      <p:sp>
+        <p:nvSpPr>
+          <p:cNvPr id="4" name="Slide Number Placeholder 3"/>
+          <p:cNvSpPr>
+            <a:spLocks noGrp="1"/>
+          </p:cNvSpPr>
+          <p:nvPr>
+            <p:ph type="sldNum" idx="5" sz="quarter"/>
+          </p:nvPr>
+        </p:nvSpPr>
+        <p:spPr/>
+      </p:sp>
+    </p:spTree>
+  </p:cSld>
+  <p:clrMapOvr>
+    <a:masterClrMapping/>
+  </p:clrMapOvr>
+</p:notes>
+</file>
+
+<file path=ppt/notesSlides/notesSlide56.xml><?xml version="1.0" encoding="utf-8"?>
+<p:notes xmlns:a="http://schemas.openxmlformats.org/drawingml/2006/main" xmlns:p="http://schemas.openxmlformats.org/presentationml/2006/main" xmlns:r="http://schemas.openxmlformats.org/officeDocument/2006/relationships">
+  <p:cSld>
+    <p:spTree>
+      <p:nvGrpSpPr>
+        <p:cNvPr id="1" name=""/>
+        <p:cNvGrpSpPr/>
+        <p:nvPr/>
+      </p:nvGrpSpPr>
+      <p:grpSpPr>
+        <a:xfrm>
+          <a:off x="0" y="0"/>
+          <a:ext cx="0" cy="0"/>
+          <a:chOff x="0" y="0"/>
+          <a:chExt cx="0" cy="0"/>
+        </a:xfrm>
+      </p:grpSpPr>
+      <p:sp>
+        <p:nvSpPr>
+          <p:cNvPr id="2" name="Slide Image Placeholder 1"/>
+          <p:cNvSpPr>
+            <a:spLocks noGrp="1"/>
+          </p:cNvSpPr>
+          <p:nvPr>
+            <p:ph type="sldImg" idx="2"/>
+          </p:nvPr>
+        </p:nvSpPr>
+        <p:spPr/>
+      </p:sp>
+      <p:sp>
+        <p:nvSpPr>
+          <p:cNvPr id="3" name="Notes Placeholder 2"/>
+          <p:cNvSpPr>
+            <a:spLocks noGrp="1"/>
+          </p:cNvSpPr>
+          <p:nvPr>
+            <p:ph type="body" idx="3" sz="quarter"/>
+          </p:nvPr>
+        </p:nvSpPr>
+        <p:spPr/>
+        <p:txBody>
+          <a:bodyPr/>
+          <a:lstStyle/>
+          <a:p>
+            <a:r>
+              <a:t>VO: The first fade: the team gets pulled away. A flagship programme runs into trouble and needs skilled people. Your architects are the obvious choice. They are seconded just for a few months, and the architecture work stops. This is the most common way EA programmes die. The counter is a protection promise — an explicit, written commitment that the EA team will not be pulled onto the urgent project of the week — and it must be recommitted whenever the minister or the sponsor changes, because the new one never feels bound by the old one's promise.</a:t>
+            </a:r>
+          </a:p>
+        </p:txBody>
+      </p:sp>
+      <p:sp>
+        <p:nvSpPr>
+          <p:cNvPr id="4" name="Slide Number Placeholder 3"/>
+          <p:cNvSpPr>
+            <a:spLocks noGrp="1"/>
+          </p:cNvSpPr>
+          <p:nvPr>
+            <p:ph type="sldNum" idx="5" sz="quarter"/>
+          </p:nvPr>
+        </p:nvSpPr>
+        <p:spPr/>
+      </p:sp>
+    </p:spTree>
+  </p:cSld>
+  <p:clrMapOvr>
+    <a:masterClrMapping/>
+  </p:clrMapOvr>
+</p:notes>
+</file>
+
+<file path=ppt/notesSlides/notesSlide57.xml><?xml version="1.0" encoding="utf-8"?>
+<p:notes xmlns:a="http://schemas.openxmlformats.org/drawingml/2006/main" xmlns:p="http://schemas.openxmlformats.org/presentationml/2006/main" xmlns:r="http://schemas.openxmlformats.org/officeDocument/2006/relationships">
+  <p:cSld>
+    <p:spTree>
+      <p:nvGrpSpPr>
+        <p:cNvPr id="1" name=""/>
+        <p:cNvGrpSpPr/>
+        <p:nvPr/>
+      </p:nvGrpSpPr>
+      <p:grpSpPr>
+        <a:xfrm>
+          <a:off x="0" y="0"/>
+          <a:ext cx="0" cy="0"/>
+          <a:chOff x="0" y="0"/>
+          <a:chExt cx="0" cy="0"/>
+        </a:xfrm>
+      </p:grpSpPr>
+      <p:sp>
+        <p:nvSpPr>
+          <p:cNvPr id="2" name="Slide Image Placeholder 1"/>
+          <p:cNvSpPr>
+            <a:spLocks noGrp="1"/>
+          </p:cNvSpPr>
+          <p:nvPr>
+            <p:ph type="sldImg" idx="2"/>
+          </p:nvPr>
+        </p:nvSpPr>
+        <p:spPr/>
+      </p:sp>
+      <p:sp>
+        <p:nvSpPr>
+          <p:cNvPr id="3" name="Notes Placeholder 2"/>
+          <p:cNvSpPr>
+            <a:spLocks noGrp="1"/>
+          </p:cNvSpPr>
+          <p:nvPr>
+            <p:ph type="body" idx="3" sz="quarter"/>
+          </p:nvPr>
+        </p:nvSpPr>
+        <p:spPr/>
+        <p:txBody>
+          <a:bodyPr/>
+          <a:lstStyle/>
+          <a:p>
+            <a:r>
+              <a:t>VO: The second fade: the repository goes stale. Updates slip during a busy quarter. The picture drifts from reality. Someone relies on it, gets burned, and word spreads that the repository cannot be trusted. Once trust goes, people stop using it, and an unused repository is a dead one. The counter is the update discipline — one named owner accountable for currency, updates tied to real events and to the review gate, so the repository stays true as a by-product of work that happens anyway.</a:t>
+            </a:r>
+          </a:p>
+        </p:txBody>
+      </p:sp>
+      <p:sp>
+        <p:nvSpPr>
+          <p:cNvPr id="4" name="Slide Number Placeholder 3"/>
+          <p:cNvSpPr>
+            <a:spLocks noGrp="1"/>
+          </p:cNvSpPr>
+          <p:nvPr>
+            <p:ph type="sldNum" idx="5" sz="quarter"/>
+          </p:nvPr>
+        </p:nvSpPr>
+        <p:spPr/>
+      </p:sp>
+    </p:spTree>
+  </p:cSld>
+  <p:clrMapOvr>
+    <a:masterClrMapping/>
+  </p:clrMapOvr>
+</p:notes>
+</file>
+
+<file path=ppt/notesSlides/notesSlide58.xml><?xml version="1.0" encoding="utf-8"?>
+<p:notes xmlns:a="http://schemas.openxmlformats.org/drawingml/2006/main" xmlns:p="http://schemas.openxmlformats.org/presentationml/2006/main" xmlns:r="http://schemas.openxmlformats.org/officeDocument/2006/relationships">
+  <p:cSld>
+    <p:spTree>
+      <p:nvGrpSpPr>
+        <p:cNvPr id="1" name=""/>
+        <p:cNvGrpSpPr/>
+        <p:nvPr/>
+      </p:nvGrpSpPr>
+      <p:grpSpPr>
+        <a:xfrm>
+          <a:off x="0" y="0"/>
+          <a:ext cx="0" cy="0"/>
+          <a:chOff x="0" y="0"/>
+          <a:chExt cx="0" cy="0"/>
+        </a:xfrm>
+      </p:grpSpPr>
+      <p:sp>
+        <p:nvSpPr>
+          <p:cNvPr id="2" name="Slide Image Placeholder 1"/>
+          <p:cNvSpPr>
+            <a:spLocks noGrp="1"/>
+          </p:cNvSpPr>
+          <p:nvPr>
+            <p:ph type="sldImg" idx="2"/>
+          </p:nvPr>
+        </p:nvSpPr>
+        <p:spPr/>
+      </p:sp>
+      <p:sp>
+        <p:nvSpPr>
+          <p:cNvPr id="3" name="Notes Placeholder 2"/>
+          <p:cNvSpPr>
+            <a:spLocks noGrp="1"/>
+          </p:cNvSpPr>
+          <p:nvPr>
+            <p:ph type="body" idx="3" sz="quarter"/>
+          </p:nvPr>
+        </p:nvSpPr>
+        <p:spPr/>
+        <p:txBody>
+          <a:bodyPr/>
+          <a:lstStyle/>
+          <a:p>
+            <a:r>
+              <a:t>VO: The third fade: the Board drifts back to advisory. Under delivery pressure, a powerful project is let through despite the Board's objection. Then another. The Board's no quietly becomes a suggestion, projects learn they can route around it, and within a year it is a discussion group again. The counter is to protect the binding authority deliberately — and to track and report every time the Board is overruled. Sunlight on overrides is what keeps the authority real; a Board overruled in silence is a Board being dismantled.</a:t>
+            </a:r>
+          </a:p>
+        </p:txBody>
+      </p:sp>
+      <p:sp>
+        <p:nvSpPr>
+          <p:cNvPr id="4" name="Slide Number Placeholder 3"/>
+          <p:cNvSpPr>
+            <a:spLocks noGrp="1"/>
+          </p:cNvSpPr>
+          <p:nvPr>
+            <p:ph type="sldNum" idx="5" sz="quarter"/>
+          </p:nvPr>
+        </p:nvSpPr>
+        <p:spPr/>
+      </p:sp>
+    </p:spTree>
+  </p:cSld>
+  <p:clrMapOvr>
+    <a:masterClrMapping/>
+  </p:clrMapOvr>
+</p:notes>
+</file>
+
+<file path=ppt/notesSlides/notesSlide59.xml><?xml version="1.0" encoding="utf-8"?>
+<p:notes xmlns:a="http://schemas.openxmlformats.org/drawingml/2006/main" xmlns:p="http://schemas.openxmlformats.org/presentationml/2006/main" xmlns:r="http://schemas.openxmlformats.org/officeDocument/2006/relationships">
+  <p:cSld>
+    <p:spTree>
+      <p:nvGrpSpPr>
+        <p:cNvPr id="1" name=""/>
+        <p:cNvGrpSpPr/>
+        <p:nvPr/>
+      </p:nvGrpSpPr>
+      <p:grpSpPr>
+        <a:xfrm>
+          <a:off x="0" y="0"/>
+          <a:ext cx="0" cy="0"/>
+          <a:chOff x="0" y="0"/>
+          <a:chExt cx="0" cy="0"/>
+        </a:xfrm>
+      </p:grpSpPr>
+      <p:sp>
+        <p:nvSpPr>
+          <p:cNvPr id="2" name="Slide Image Placeholder 1"/>
+          <p:cNvSpPr>
+            <a:spLocks noGrp="1"/>
+          </p:cNvSpPr>
+          <p:nvPr>
+            <p:ph type="sldImg" idx="2"/>
+          </p:nvPr>
+        </p:nvSpPr>
+        <p:spPr/>
+      </p:sp>
+      <p:sp>
+        <p:nvSpPr>
+          <p:cNvPr id="3" name="Notes Placeholder 2"/>
+          <p:cNvSpPr>
+            <a:spLocks noGrp="1"/>
+          </p:cNvSpPr>
+          <p:nvPr>
+            <p:ph type="body" idx="3" sz="quarter"/>
+          </p:nvPr>
+        </p:nvSpPr>
+        <p:spPr/>
+        <p:txBody>
+          <a:bodyPr/>
+          <a:lstStyle/>
+          <a:p>
+            <a:r>
+              <a:t>VO: The fourth fade: the sponsor changes. The minister or the digitalisation officer who championed the EA moves on. The successor has their own priorities and no attachment to this one. The counter is to make the EA outlive its sponsor — institutionalise it. A legal mandate for the Board, not just a memo. A budget line, not an annual favour. And the one-page scorecard, so a new sponsor can see in five minutes that the EA is returning its cost. An EA that depends on one champion dies with that champion's tenure. One that is institutionalised survives the handover.</a:t>
+            </a:r>
+          </a:p>
+        </p:txBody>
+      </p:sp>
+      <p:sp>
+        <p:nvSpPr>
+          <p:cNvPr id="4" name="Slide Number Placeholder 3"/>
+          <p:cNvSpPr>
+            <a:spLocks noGrp="1"/>
+          </p:cNvSpPr>
+          <p:nvPr>
+            <p:ph type="sldNum" idx="5" sz="quarter"/>
+          </p:nvPr>
+        </p:nvSpPr>
+        <p:spPr/>
+      </p:sp>
+    </p:spTree>
+  </p:cSld>
+  <p:clrMapOvr>
+    <a:masterClrMapping/>
+  </p:clrMapOvr>
+</p:notes>
+</file>
+
+<file path=ppt/notesSlides/notesSlide60.xml><?xml version="1.0" encoding="utf-8"?>
+<p:notes xmlns:a="http://schemas.openxmlformats.org/drawingml/2006/main" xmlns:p="http://schemas.openxmlformats.org/presentationml/2006/main" xmlns:r="http://schemas.openxmlformats.org/officeDocument/2006/relationships">
+  <p:cSld>
+    <p:spTree>
+      <p:nvGrpSpPr>
+        <p:cNvPr id="1" name=""/>
+        <p:cNvGrpSpPr/>
+        <p:nvPr/>
+      </p:nvGrpSpPr>
+      <p:grpSpPr>
+        <a:xfrm>
+          <a:off x="0" y="0"/>
+          <a:ext cx="0" cy="0"/>
+          <a:chOff x="0" y="0"/>
+          <a:chExt cx="0" cy="0"/>
+        </a:xfrm>
+      </p:grpSpPr>
+      <p:sp>
+        <p:nvSpPr>
+          <p:cNvPr id="2" name="Slide Image Placeholder 1"/>
+          <p:cNvSpPr>
+            <a:spLocks noGrp="1"/>
+          </p:cNvSpPr>
+          <p:nvPr>
+            <p:ph type="sldImg" idx="2"/>
+          </p:nvPr>
+        </p:nvSpPr>
+        <p:spPr/>
+      </p:sp>
+      <p:sp>
+        <p:nvSpPr>
+          <p:cNvPr id="3" name="Notes Placeholder 2"/>
+          <p:cNvSpPr>
+            <a:spLocks noGrp="1"/>
+          </p:cNvSpPr>
+          <p:nvPr>
+            <p:ph type="body" idx="3" sz="quarter"/>
+          </p:nvPr>
+        </p:nvSpPr>
+        <p:spPr/>
+        <p:txBody>
+          <a:bodyPr/>
+          <a:lstStyle/>
+          <a:p>
+            <a:r>
+              <a:t>VO: One honest thing to carry. A mature EA practice takes about five years. The architect who stands it up is rarely the one who sees it mature. That is not a reason for discouragement — it is the job. You are building something designed to outlast you: a repository that stays true without you, a Board that holds without you, a mandate that survives the next election. Build it to survive you, and you have done the work. Build it to depend on you, and it fades the moment you leave.</a:t>
+            </a:r>
+          </a:p>
+        </p:txBody>
+      </p:sp>
+      <p:sp>
+        <p:nvSpPr>
+          <p:cNvPr id="4" name="Slide Number Placeholder 3"/>
+          <p:cNvSpPr>
+            <a:spLocks noGrp="1"/>
+          </p:cNvSpPr>
+          <p:nvPr>
+            <p:ph type="sldNum" idx="5" sz="quarter"/>
+          </p:nvPr>
+        </p:nvSpPr>
+        <p:spPr/>
+      </p:sp>
+    </p:spTree>
+  </p:cSld>
+  <p:clrMapOvr>
+    <a:masterClrMapping/>
+  </p:clrMapOvr>
+</p:notes>
+</file>
+
+<file path=ppt/notesSlides/notesSlide61.xml><?xml version="1.0" encoding="utf-8"?>
+<p:notes xmlns:a="http://schemas.openxmlformats.org/drawingml/2006/main" xmlns:p="http://schemas.openxmlformats.org/presentationml/2006/main" xmlns:r="http://schemas.openxmlformats.org/officeDocument/2006/relationships">
+  <p:cSld>
+    <p:spTree>
+      <p:nvGrpSpPr>
+        <p:cNvPr id="1" name=""/>
+        <p:cNvGrpSpPr/>
+        <p:nvPr/>
+      </p:nvGrpSpPr>
+      <p:grpSpPr>
+        <a:xfrm>
+          <a:off x="0" y="0"/>
+          <a:ext cx="0" cy="0"/>
+          <a:chOff x="0" y="0"/>
+          <a:chExt cx="0" cy="0"/>
+        </a:xfrm>
+      </p:grpSpPr>
+      <p:sp>
+        <p:nvSpPr>
+          <p:cNvPr id="2" name="Slide Image Placeholder 1"/>
+          <p:cNvSpPr>
+            <a:spLocks noGrp="1"/>
+          </p:cNvSpPr>
+          <p:nvPr>
+            <p:ph type="sldImg" idx="2"/>
+          </p:nvPr>
+        </p:nvSpPr>
+        <p:spPr/>
+      </p:sp>
+      <p:sp>
+        <p:nvSpPr>
+          <p:cNvPr id="3" name="Notes Placeholder 2"/>
+          <p:cNvSpPr>
+            <a:spLocks noGrp="1"/>
+          </p:cNvSpPr>
+          <p:nvPr>
+            <p:ph type="body" idx="3" sz="quarter"/>
+          </p:nvPr>
+        </p:nvSpPr>
+        <p:spPr/>
+        <p:txBody>
+          <a:bodyPr/>
+          <a:lstStyle/>
+          <a:p>
+            <a:r>
+              <a:t>PRACTICE BOX (on-screen only — never read it, never paraphrase it, never point at it). It replaces the narrated handoff: this video ends on the recap and the Sources slide.</a:t>
+            </a:r>
+          </a:p>
+          <a:p/>
+          <a:p>
+            <a:r>
+              <a:t>VO: Watch for the four fades — the team pulled, the repository stale, the Board gone advisory, the sponsor changed — and counter each. Keep the practice alive past year two, and the architecture becomes how government works.</a:t>
+            </a:r>
+          </a:p>
+        </p:txBody>
+      </p:sp>
+      <p:sp>
+        <p:nvSpPr>
+          <p:cNvPr id="4" name="Slide Number Placeholder 3"/>
+          <p:cNvSpPr>
+            <a:spLocks noGrp="1"/>
+          </p:cNvSpPr>
+          <p:nvPr>
+            <p:ph type="sldNum" idx="5" sz="quarter"/>
+          </p:nvPr>
+        </p:nvSpPr>
+        <p:spPr/>
+      </p:sp>
+    </p:spTree>
+  </p:cSld>
+  <p:clrMapOvr>
+    <a:masterClrMapping/>
+  </p:clrMapOvr>
+</p:notes>
+</file>
+
+<file path=ppt/notesSlides/notesSlide62.xml><?xml version="1.0" encoding="utf-8"?>
 <p:notes xmlns:a="http://schemas.openxmlformats.org/drawingml/2006/main" xmlns:p="http://schemas.openxmlformats.org/presentationml/2006/main" xmlns:r="http://schemas.openxmlformats.org/officeDocument/2006/relationships">
   <p:cSld>
     <p:spTree>
@@ -11667,8 +11667,8 @@
 </p:sldMaster>
 </file>
 
-<file path=ppt/slides/slide1.xml><?xml version="1.0" encoding="utf-8"?>
-<p:sld xmlns:a="http://schemas.openxmlformats.org/drawingml/2006/main" xmlns:r="http://schemas.openxmlformats.org/officeDocument/2006/relationships" xmlns:p="http://schemas.openxmlformats.org/presentationml/2006/main">
+<file path=ppt/slides/slide54.xml><?xml version="1.0" encoding="utf-8"?>
+<p:sld xmlns:a="http://schemas.openxmlformats.org/drawingml/2006/main" xmlns:p="http://schemas.openxmlformats.org/presentationml/2006/main" xmlns:r="http://schemas.openxmlformats.org/officeDocument/2006/relationships">
   <p:cSld>
     <p:spTree>
       <p:nvGrpSpPr>
@@ -11676,222 +11676,133 @@
         <p:cNvGrpSpPr/>
         <p:nvPr/>
       </p:nvGrpSpPr>
-      <p:grpSpPr>
-        <a:xfrm>
-          <a:off x="0" y="0"/>
-          <a:ext cx="0" cy="0"/>
-          <a:chOff x="0" y="0"/>
-          <a:chExt cx="0" cy="0"/>
-        </a:xfrm>
-      </p:grpSpPr>
-      <p:cxnSp>
-        <p:nvCxnSpPr>
-          <p:cNvPr id="11" name="Straight Connector 10">
-            <a:extLst>
-              <a:ext uri="{FF2B5EF4-FFF2-40B4-BE49-F238E27FC236}">
-                <a16:creationId xmlns:a16="http://schemas.microsoft.com/office/drawing/2014/main" id="{D9AD66F2-F7C0-4D03-9150-D28F17AC561D}"/>
-              </a:ext>
-            </a:extLst>
-          </p:cNvPr>
-          <p:cNvCxnSpPr>
-            <a:cxnSpLocks/>
-          </p:cNvCxnSpPr>
+      <p:grpSpPr/>
+      <p:sp>
+        <p:nvSpPr>
+          <p:cNvPr id="2" name="TextBox 1"/>
+          <p:cNvSpPr txBox="1"/>
           <p:nvPr/>
-        </p:nvCxnSpPr>
-        <p:spPr>
-          <a:xfrm>
-            <a:off x="373021" y="2198718"/>
-            <a:ext cx="6843567" cy="0"/>
-          </a:xfrm>
-          <a:prstGeom prst="line">
-            <a:avLst/>
-          </a:prstGeom>
-          <a:ln w="12700">
-            <a:solidFill>
-              <a:srgbClr val="009CD6"/>
-            </a:solidFill>
-          </a:ln>
-        </p:spPr>
-        <p:style>
-          <a:lnRef idx="1">
-            <a:schemeClr val="accent1"/>
-          </a:lnRef>
-          <a:fillRef idx="0">
-            <a:schemeClr val="accent1"/>
-          </a:fillRef>
-          <a:effectRef idx="0">
-            <a:schemeClr val="accent1"/>
-          </a:effectRef>
-          <a:fontRef idx="minor">
-            <a:schemeClr val="tx1"/>
-          </a:fontRef>
-        </p:style>
-      </p:cxnSp>
-      <p:sp>
-        <p:nvSpPr>
-          <p:cNvPr id="12" name="Title 9">
-            <a:extLst>
-              <a:ext uri="{FF2B5EF4-FFF2-40B4-BE49-F238E27FC236}">
-                <a16:creationId xmlns:a16="http://schemas.microsoft.com/office/drawing/2014/main" id="{EEB08032-CE0E-4986-AEDF-A41026C0E8B9}"/>
-              </a:ext>
-            </a:extLst>
-          </p:cNvPr>
-          <p:cNvSpPr txBox="1">
-            <a:spLocks/>
-          </p:cNvSpPr>
-          <p:nvPr/>
-        </p:nvSpPr>
-        <p:spPr>
-          <a:xfrm>
-            <a:off x="237734" y="702833"/>
-            <a:ext cx="6432007" cy="1218817"/>
+        </p:nvSpPr>
+        <p:spPr>
+          <a:xfrm>
+            <a:off x="822960" y="822960"/>
+            <a:ext cx="7315200" cy="457200"/>
           </a:xfrm>
           <a:prstGeom prst="rect">
             <a:avLst/>
           </a:prstGeom>
-        </p:spPr>
-        <p:txBody>
-          <a:bodyPr anchor="b">
-            <a:noAutofit/>
+          <a:noFill/>
+        </p:spPr>
+        <p:txBody>
+          <a:bodyPr wrap="square">
+            <a:spAutoFit/>
           </a:bodyPr>
-          <a:lstStyle>
-            <a:lvl1pPr algn="l" defTabSz="914400" rtl="0" eaLnBrk="1" latinLnBrk="0" hangingPunct="1">
-              <a:lnSpc>
-                <a:spcPct val="90000"/>
-              </a:lnSpc>
-              <a:spcBef>
-                <a:spcPct val="0"/>
-              </a:spcBef>
-              <a:buNone/>
-              <a:defRPr sz="4000" kern="1200">
+          <a:lstStyle/>
+          <a:p>
+            <a:r>
+              <a:rPr sz="1200" b="1" i="0">
                 <a:solidFill>
-                  <a:schemeClr val="bg1"/>
+                  <a:srgbClr val="595959"/>
                 </a:solidFill>
-                <a:latin typeface="Arial" panose="020B0604020202020204" pitchFamily="34" charset="0"/>
-                <a:ea typeface="+mj-ea"/>
-                <a:cs typeface="Arial" panose="020B0604020202020204" pitchFamily="34" charset="0"/>
-              </a:defRPr>
-            </a:lvl1pPr>
-          </a:lstStyle>
-          <a:p>
-            <a:r>
-              <a:rPr sz="2800" b="1" i="0">
+                <a:latin typeface="Arial"/>
+              </a:rPr>
+              <a:t>KP1 · MODULE 3 · VIDEO 3.7</a:t>
+            </a:r>
+          </a:p>
+        </p:txBody>
+      </p:sp>
+      <p:sp>
+        <p:nvSpPr>
+          <p:cNvPr id="3" name="TextBox 2"/>
+          <p:cNvSpPr txBox="1"/>
+          <p:nvPr/>
+        </p:nvSpPr>
+        <p:spPr>
+          <a:xfrm>
+            <a:off x="822960" y="1828800"/>
+            <a:ext cx="2011680" cy="1097280"/>
+          </a:xfrm>
+          <a:prstGeom prst="rect">
+            <a:avLst/>
+          </a:prstGeom>
+          <a:noFill/>
+        </p:spPr>
+        <p:txBody>
+          <a:bodyPr wrap="square">
+            <a:spAutoFit/>
+          </a:bodyPr>
+          <a:lstStyle/>
+          <a:p>
+            <a:r>
+              <a:rPr sz="6000" b="1" i="0">
+                <a:solidFill>
+                  <a:srgbClr val="009CD6"/>
+                </a:solidFill>
+                <a:latin typeface="Arial"/>
+              </a:rPr>
+              <a:t>3.7</a:t>
+            </a:r>
+          </a:p>
+        </p:txBody>
+      </p:sp>
+      <p:sp>
+        <p:nvSpPr>
+          <p:cNvPr id="4" name="TextBox 3"/>
+          <p:cNvSpPr txBox="1"/>
+          <p:nvPr/>
+        </p:nvSpPr>
+        <p:spPr>
+          <a:xfrm>
+            <a:off x="822960" y="2880360"/>
+            <a:ext cx="9601200" cy="1371600"/>
+          </a:xfrm>
+          <a:prstGeom prst="rect">
+            <a:avLst/>
+          </a:prstGeom>
+          <a:noFill/>
+        </p:spPr>
+        <p:txBody>
+          <a:bodyPr wrap="square">
+            <a:spAutoFit/>
+          </a:bodyPr>
+          <a:lstStyle/>
+          <a:p>
+            <a:r>
+              <a:rPr sz="3400" b="1" i="0">
                 <a:solidFill>
                   <a:srgbClr val="1A1A1A"/>
                 </a:solidFill>
                 <a:latin typeface="Arial"/>
               </a:rPr>
-              <a:t>3.7 — Keep the practice alive past year two</a:t>
-            </a:r>
-          </a:p>
-        </p:txBody>
-      </p:sp>
-      <p:pic>
-        <p:nvPicPr>
-          <p:cNvPr id="7" name="Picture 6">
-            <a:extLst>
-              <a:ext uri="{FF2B5EF4-FFF2-40B4-BE49-F238E27FC236}">
-                <a16:creationId xmlns:a16="http://schemas.microsoft.com/office/drawing/2014/main" id="{A2066351-C569-4C4C-A096-308777FCDC32}"/>
-              </a:ext>
-            </a:extLst>
-          </p:cNvPr>
-          <p:cNvPicPr>
-            <a:picLocks noChangeAspect="1"/>
-          </p:cNvPicPr>
+              <a:t>Keep the practice alive past year two</a:t>
+            </a:r>
+          </a:p>
+        </p:txBody>
+      </p:sp>
+      <p:sp>
+        <p:nvSpPr>
+          <p:cNvPr id="5" name="TextBox 4"/>
+          <p:cNvSpPr txBox="1"/>
           <p:nvPr/>
-        </p:nvPicPr>
-        <p:blipFill>
-          <a:blip r:embed="rId2">
-            <a:extLst>
-              <a:ext uri="{28A0092B-C50C-407E-A947-70E740481C1C}">
-                <a14:useLocalDpi xmlns:a14="http://schemas.microsoft.com/office/drawing/2010/main" val="0"/>
-              </a:ext>
-            </a:extLst>
-          </a:blip>
-          <a:srcRect t="20219" b="14729"/>
-          <a:stretch>
-            <a:fillRect/>
-          </a:stretch>
-        </p:blipFill>
-        <p:spPr>
-          <a:xfrm>
-            <a:off x="0" y="5620871"/>
-            <a:ext cx="1323975" cy="1218816"/>
+        </p:nvSpPr>
+        <p:spPr>
+          <a:xfrm>
+            <a:off x="822960" y="4343400"/>
+            <a:ext cx="9875520" cy="1554480"/>
           </a:xfrm>
           <a:prstGeom prst="rect">
             <a:avLst/>
           </a:prstGeom>
-        </p:spPr>
-      </p:pic>
-      <p:sp>
-        <p:nvSpPr>
-          <p:cNvPr id="14" name="Title 9">
-            <a:extLst>
-              <a:ext uri="{FF2B5EF4-FFF2-40B4-BE49-F238E27FC236}">
-                <a16:creationId xmlns:a16="http://schemas.microsoft.com/office/drawing/2014/main" id="{B5087B80-3EE4-1881-0130-ED58CA625092}"/>
-              </a:ext>
-            </a:extLst>
-          </p:cNvPr>
-          <p:cNvSpPr txBox="1">
-            <a:spLocks/>
-          </p:cNvSpPr>
-          <p:nvPr/>
-        </p:nvSpPr>
-        <p:spPr>
-          <a:xfrm>
-            <a:off x="284452" y="2475786"/>
-            <a:ext cx="6382893" cy="953213"/>
-          </a:xfrm>
-          <a:prstGeom prst="rect">
-            <a:avLst/>
-          </a:prstGeom>
-        </p:spPr>
-        <p:txBody>
-          <a:bodyPr anchor="t">
-            <a:noAutofit/>
+          <a:noFill/>
+        </p:spPr>
+        <p:txBody>
+          <a:bodyPr wrap="square">
+            <a:spAutoFit/>
           </a:bodyPr>
-          <a:lstStyle>
-            <a:lvl1pPr algn="l" defTabSz="914400" rtl="0" eaLnBrk="1" latinLnBrk="0" hangingPunct="1">
-              <a:lnSpc>
-                <a:spcPct val="90000"/>
-              </a:lnSpc>
-              <a:spcBef>
-                <a:spcPct val="0"/>
-              </a:spcBef>
-              <a:buNone/>
-              <a:defRPr sz="4000" kern="1200">
-                <a:solidFill>
-                  <a:schemeClr val="bg1"/>
-                </a:solidFill>
-                <a:latin typeface="Arial" panose="020B0604020202020204" pitchFamily="34" charset="0"/>
-                <a:ea typeface="+mj-ea"/>
-                <a:cs typeface="Arial" panose="020B0604020202020204" pitchFamily="34" charset="0"/>
-              </a:defRPr>
-            </a:lvl1pPr>
-          </a:lstStyle>
-          <a:p>
-            <a:pPr marL="0" marR="0" lvl="0" indent="0" rtl="0">
-              <a:spcBef>
-                <a:spcPts val="600"/>
-              </a:spcBef>
-              <a:spcAft>
-                <a:spcPts val="0"/>
-              </a:spcAft>
-              <a:buNone/>
-            </a:pPr>
-            <a:r>
-              <a:rPr sz="1300" b="1" i="0">
-                <a:solidFill>
-                  <a:srgbClr val="006E96"/>
-                </a:solidFill>
-                <a:latin typeface="Arial"/>
-              </a:rPr>
-              <a:t>KP1 · Government Enterprise Architecture · Module 3 · Video 3.7</a:t>
-            </a:r>
-          </a:p>
-          <a:p>
-            <a:r>
-              <a:rPr sz="1200" b="0" i="1">
+          <a:lstStyle/>
+          <a:p>
+            <a:r>
+              <a:rPr sz="1700" b="0" i="1">
                 <a:solidFill>
                   <a:srgbClr val="595959"/>
                 </a:solidFill>
@@ -11904,91 +11815,292 @@
       </p:sp>
       <p:sp>
         <p:nvSpPr>
-          <p:cNvPr id="17" name="Title 9">
-            <a:extLst>
-              <a:ext uri="{FF2B5EF4-FFF2-40B4-BE49-F238E27FC236}">
-                <a16:creationId xmlns:a16="http://schemas.microsoft.com/office/drawing/2014/main" id="{5E8796F7-DD26-D250-5E97-B38B22298E72}"/>
-              </a:ext>
-            </a:extLst>
-          </p:cNvPr>
-          <p:cNvSpPr txBox="1">
-            <a:spLocks/>
-          </p:cNvSpPr>
+          <p:cNvPr id="6" name="TextBox 5"/>
+          <p:cNvSpPr txBox="1"/>
           <p:nvPr/>
         </p:nvSpPr>
         <p:spPr>
           <a:xfrm>
-            <a:off x="284452" y="4363897"/>
-            <a:ext cx="6382893" cy="953213"/>
+            <a:off x="822960" y="5989320"/>
+            <a:ext cx="7315200" cy="365760"/>
           </a:xfrm>
           <a:prstGeom prst="rect">
             <a:avLst/>
           </a:prstGeom>
-        </p:spPr>
-        <p:txBody>
-          <a:bodyPr anchor="t">
-            <a:noAutofit/>
+          <a:noFill/>
+        </p:spPr>
+        <p:txBody>
+          <a:bodyPr wrap="square">
+            <a:spAutoFit/>
           </a:bodyPr>
-          <a:lstStyle>
-            <a:lvl1pPr algn="l" defTabSz="914400" rtl="0" eaLnBrk="1" latinLnBrk="0" hangingPunct="1">
-              <a:lnSpc>
-                <a:spcPct val="90000"/>
-              </a:lnSpc>
-              <a:spcBef>
-                <a:spcPct val="0"/>
-              </a:spcBef>
-              <a:buNone/>
-              <a:defRPr sz="4000" kern="1200">
+          <a:lstStyle/>
+          <a:p>
+            <a:r>
+              <a:rPr sz="1200" b="0" i="0">
                 <a:solidFill>
-                  <a:schemeClr val="bg1"/>
+                  <a:srgbClr val="595959"/>
                 </a:solidFill>
-                <a:latin typeface="Arial" panose="020B0604020202020204" pitchFamily="34" charset="0"/>
-                <a:ea typeface="+mj-ea"/>
-                <a:cs typeface="Arial" panose="020B0604020202020204" pitchFamily="34" charset="0"/>
-              </a:defRPr>
-            </a:lvl1pPr>
-          </a:lstStyle>
-          <a:p>
-            <a:pPr marL="0" marR="0" lvl="0" indent="0" rtl="0">
-              <a:spcBef>
-                <a:spcPts val="600"/>
-              </a:spcBef>
-              <a:spcAft>
-                <a:spcPts val="1200"/>
-              </a:spcAft>
-              <a:buNone/>
-            </a:pPr>
-            <a:r>
-              <a:rPr sz="1400" b="1" i="0">
+                <a:latin typeface="Arial"/>
+              </a:rPr>
+              <a:t>~5 minutes · standalone video · voice-over on text slides</a:t>
+            </a:r>
+          </a:p>
+        </p:txBody>
+      </p:sp>
+    </p:spTree>
+  </p:cSld>
+  <p:clrMapOvr>
+    <a:masterClrMapping/>
+  </p:clrMapOvr>
+</p:sld>
+</file>
+
+<file path=ppt/slides/slide55.xml><?xml version="1.0" encoding="utf-8"?>
+<p:sld xmlns:a="http://schemas.openxmlformats.org/drawingml/2006/main" xmlns:p="http://schemas.openxmlformats.org/presentationml/2006/main" xmlns:r="http://schemas.openxmlformats.org/officeDocument/2006/relationships">
+  <p:cSld>
+    <p:spTree>
+      <p:nvGrpSpPr>
+        <p:cNvPr id="1" name=""/>
+        <p:cNvGrpSpPr/>
+        <p:nvPr/>
+      </p:nvGrpSpPr>
+      <p:grpSpPr/>
+      <p:sp>
+        <p:nvSpPr>
+          <p:cNvPr id="2" name="TextBox 1"/>
+          <p:cNvSpPr txBox="1"/>
+          <p:nvPr/>
+        </p:nvSpPr>
+        <p:spPr>
+          <a:xfrm>
+            <a:off x="1005840" y="1325880"/>
+            <a:ext cx="5486400" cy="365760"/>
+          </a:xfrm>
+          <a:prstGeom prst="rect">
+            <a:avLst/>
+          </a:prstGeom>
+          <a:noFill/>
+        </p:spPr>
+        <p:txBody>
+          <a:bodyPr wrap="square">
+            <a:spAutoFit/>
+          </a:bodyPr>
+          <a:lstStyle/>
+          <a:p>
+            <a:r>
+              <a:rPr sz="1200" b="1" i="0">
+                <a:solidFill>
+                  <a:srgbClr val="006E96"/>
+                </a:solidFill>
+                <a:latin typeface="Arial"/>
+              </a:rPr>
+              <a:t>WHERE WE START</a:t>
+            </a:r>
+          </a:p>
+        </p:txBody>
+      </p:sp>
+      <p:sp>
+        <p:nvSpPr>
+          <p:cNvPr id="3" name="TextBox 2"/>
+          <p:cNvSpPr txBox="1"/>
+          <p:nvPr/>
+        </p:nvSpPr>
+        <p:spPr>
+          <a:xfrm>
+            <a:off x="1005840" y="1783080"/>
+            <a:ext cx="10149840" cy="1737360"/>
+          </a:xfrm>
+          <a:prstGeom prst="rect">
+            <a:avLst/>
+          </a:prstGeom>
+          <a:noFill/>
+        </p:spPr>
+        <p:txBody>
+          <a:bodyPr wrap="square">
+            <a:spAutoFit/>
+          </a:bodyPr>
+          <a:lstStyle/>
+          <a:p>
+            <a:r>
+              <a:rPr sz="3000" b="1" i="0">
                 <a:solidFill>
                   <a:srgbClr val="1A1A1A"/>
                 </a:solidFill>
                 <a:latin typeface="Arial"/>
               </a:rPr>
-              <a:t>Target audience: </a:t>
-            </a:r>
-            <a:r>
-              <a:rPr sz="1400" b="0" i="0">
+              <a:t>Most EA programmes do not fail dramatically. They fade.</a:t>
+            </a:r>
+          </a:p>
+        </p:txBody>
+      </p:sp>
+      <p:sp>
+        <p:nvSpPr>
+          <p:cNvPr id="4" name="TextBox 3"/>
+          <p:cNvSpPr txBox="1"/>
+          <p:nvPr/>
+        </p:nvSpPr>
+        <p:spPr>
+          <a:xfrm>
+            <a:off x="1005840" y="3611880"/>
+            <a:ext cx="10149840" cy="2377440"/>
+          </a:xfrm>
+          <a:prstGeom prst="rect">
+            <a:avLst/>
+          </a:prstGeom>
+          <a:noFill/>
+        </p:spPr>
+        <p:txBody>
+          <a:bodyPr wrap="square">
+            <a:spAutoFit/>
+          </a:bodyPr>
+          <a:lstStyle/>
+          <a:p>
+            <a:pPr>
+              <a:spcAft>
+                <a:spcPts val="800"/>
+              </a:spcAft>
+            </a:pPr>
+            <a:r>
+              <a:rPr sz="1700" b="0" i="0">
                 <a:solidFill>
-                  <a:srgbClr val="1A1A1A"/>
+                  <a:srgbClr val="595959"/>
                 </a:solidFill>
                 <a:latin typeface="Arial"/>
               </a:rPr>
-              <a:t>Chief architect · senior architect · sector ICT lead</a:t>
-            </a:r>
-          </a:p>
-        </p:txBody>
-      </p:sp>
-      <p:sp>
-        <p:nvSpPr>
-          <p:cNvPr id="18" name="Rectangle 17"/>
+              <a:t>The first six months go well.</a:t>
+            </a:r>
+          </a:p>
+          <a:p>
+            <a:pPr>
+              <a:spcAft>
+                <a:spcPts val="800"/>
+              </a:spcAft>
+            </a:pPr>
+            <a:r>
+              <a:rPr sz="1700" b="0" i="0">
+                <a:solidFill>
+                  <a:srgbClr val="595959"/>
+                </a:solidFill>
+                <a:latin typeface="Arial"/>
+              </a:rPr>
+              <a:t>Then, somewhere in the second year, the practice quietly stops mattering.</a:t>
+            </a:r>
+          </a:p>
+          <a:p>
+            <a:pPr>
+              <a:spcAft>
+                <a:spcPts val="800"/>
+              </a:spcAft>
+            </a:pPr>
+            <a:r>
+              <a:rPr sz="1700" b="0" i="0">
+                <a:solidFill>
+                  <a:srgbClr val="595959"/>
+                </a:solidFill>
+                <a:latin typeface="Arial"/>
+              </a:rPr>
+              <a:t>The fade is predictable, and it comes in four forms.</a:t>
+            </a:r>
+          </a:p>
+        </p:txBody>
+      </p:sp>
+      <p:sp>
+        <p:nvSpPr>
+          <p:cNvPr id="5" name="TextBox 4"/>
+          <p:cNvSpPr txBox="1"/>
+          <p:nvPr/>
+        </p:nvSpPr>
+        <p:spPr>
+          <a:xfrm>
+            <a:off x="457200" y="6473952"/>
+            <a:ext cx="7772400" cy="292608"/>
+          </a:xfrm>
+          <a:prstGeom prst="rect">
+            <a:avLst/>
+          </a:prstGeom>
+          <a:noFill/>
+        </p:spPr>
+        <p:txBody>
+          <a:bodyPr wrap="square">
+            <a:spAutoFit/>
+          </a:bodyPr>
+          <a:lstStyle/>
+          <a:p>
+            <a:r>
+              <a:rPr sz="900" b="0" i="0">
+                <a:solidFill>
+                  <a:srgbClr val="595959"/>
+                </a:solidFill>
+                <a:latin typeface="Arial"/>
+              </a:rPr>
+              <a:t>3.7 · Keep the practice alive past year two</a:t>
+            </a:r>
+          </a:p>
+        </p:txBody>
+      </p:sp>
+      <p:sp>
+        <p:nvSpPr>
+          <p:cNvPr id="6" name="TextBox 5"/>
+          <p:cNvSpPr txBox="1"/>
+          <p:nvPr/>
+        </p:nvSpPr>
+        <p:spPr>
+          <a:xfrm>
+            <a:off x="10058400" y="6473952"/>
+            <a:ext cx="1673352" cy="292608"/>
+          </a:xfrm>
+          <a:prstGeom prst="rect">
+            <a:avLst/>
+          </a:prstGeom>
+          <a:noFill/>
+        </p:spPr>
+        <p:txBody>
+          <a:bodyPr wrap="square">
+            <a:spAutoFit/>
+          </a:bodyPr>
+          <a:lstStyle/>
+          <a:p>
+            <a:pPr algn="r"/>
+            <a:r>
+              <a:rPr sz="900" b="0" i="0">
+                <a:solidFill>
+                  <a:srgbClr val="595959"/>
+                </a:solidFill>
+                <a:latin typeface="Arial"/>
+              </a:rPr>
+              <a:t>www.itu.int</a:t>
+            </a:r>
+          </a:p>
+        </p:txBody>
+      </p:sp>
+    </p:spTree>
+  </p:cSld>
+  <p:clrMapOvr>
+    <a:masterClrMapping/>
+  </p:clrMapOvr>
+</p:sld>
+</file>
+
+<file path=ppt/slides/slide56.xml><?xml version="1.0" encoding="utf-8"?>
+<p:sld xmlns:a="http://schemas.openxmlformats.org/drawingml/2006/main" xmlns:p="http://schemas.openxmlformats.org/presentationml/2006/main" xmlns:r="http://schemas.openxmlformats.org/officeDocument/2006/relationships">
+  <p:cSld>
+    <p:spTree>
+      <p:nvGrpSpPr>
+        <p:cNvPr id="1" name=""/>
+        <p:cNvGrpSpPr/>
+        <p:nvPr/>
+      </p:nvGrpSpPr>
+      <p:grpSpPr/>
+      <p:sp>
+        <p:nvSpPr>
+          <p:cNvPr id="2" name="Rectangle 1"/>
           <p:cNvSpPr/>
           <p:nvPr/>
         </p:nvSpPr>
         <p:spPr>
           <a:xfrm>
-            <a:off x="7022592" y="0"/>
-            <a:ext cx="5169103" cy="6858000"/>
+            <a:off x="457200" y="384048"/>
+            <a:ext cx="45720" cy="256032"/>
           </a:xfrm>
           <a:prstGeom prst="rect">
             <a:avLst/>
@@ -12025,14 +12137,14 @@
       </p:sp>
       <p:sp>
         <p:nvSpPr>
-          <p:cNvPr id="19" name="TextBox 18"/>
+          <p:cNvPr id="3" name="TextBox 2"/>
           <p:cNvSpPr txBox="1"/>
           <p:nvPr/>
         </p:nvSpPr>
         <p:spPr>
           <a:xfrm>
-            <a:off x="7452360" y="457200"/>
-            <a:ext cx="4297680" cy="457200"/>
+            <a:off x="621792" y="274320"/>
+            <a:ext cx="11247120" cy="914400"/>
           </a:xfrm>
           <a:prstGeom prst="rect">
             <a:avLst/>
@@ -12046,35 +12158,35 @@
           <a:lstStyle/>
           <a:p>
             <a:r>
-              <a:rPr sz="1100" b="1" i="0">
+              <a:rPr sz="2800" b="1" i="0">
                 <a:solidFill>
-                  <a:srgbClr val="E5F5FB"/>
+                  <a:srgbClr val="1A1A1A"/>
                 </a:solidFill>
                 <a:latin typeface="Arial"/>
               </a:rPr>
-              <a:t>THE PRACTICE THIS MODULE STANDS UP</a:t>
-            </a:r>
-          </a:p>
-        </p:txBody>
-      </p:sp>
-      <p:sp>
-        <p:nvSpPr>
-          <p:cNvPr id="20" name="Rounded Rectangle 19"/>
+              <a:t>Fade one — your architects are the obvious people to second to the crisis</a:t>
+            </a:r>
+          </a:p>
+        </p:txBody>
+      </p:sp>
+      <p:sp>
+        <p:nvSpPr>
+          <p:cNvPr id="4" name="Rounded Rectangle 3"/>
           <p:cNvSpPr/>
           <p:nvPr/>
         </p:nvSpPr>
         <p:spPr>
           <a:xfrm>
-            <a:off x="7452360" y="960120"/>
-            <a:ext cx="3840480" cy="658368"/>
+            <a:off x="7360920" y="1207008"/>
+            <a:ext cx="841248" cy="310896"/>
           </a:xfrm>
           <a:prstGeom prst="roundRect">
             <a:avLst>
-              <a:gd name="adj" fmla="val 14000"/>
+              <a:gd name="adj" fmla="val 35000"/>
             </a:avLst>
           </a:prstGeom>
           <a:solidFill>
-            <a:srgbClr val="FFFFFF"/>
+            <a:srgbClr val="009CD6"/>
           </a:solidFill>
           <a:ln>
             <a:noFill/>
@@ -12096,40 +12208,31 @@
           </a:fontRef>
         </p:style>
         <p:txBody>
-          <a:bodyPr rtlCol="0" anchor="ctr" lIns="164592" wrap="square"/>
+          <a:bodyPr rtlCol="0" anchor="ctr"/>
           <a:lstStyle/>
           <a:p>
             <a:pPr algn="ctr"/>
-            <a:r>
-              <a:rPr sz="1500" b="1" i="0">
-                <a:solidFill>
-                  <a:srgbClr val="1A1A1A"/>
-                </a:solidFill>
-                <a:latin typeface="Arial"/>
-              </a:rPr>
-              <a:t>Repository — where the architecture lives</a:t>
-            </a:r>
-          </a:p>
-        </p:txBody>
-      </p:sp>
-      <p:sp>
-        <p:nvSpPr>
-          <p:cNvPr id="21" name="Rounded Rectangle 20"/>
+          </a:p>
+        </p:txBody>
+      </p:sp>
+      <p:sp>
+        <p:nvSpPr>
+          <p:cNvPr id="5" name="Rounded Rectangle 4"/>
           <p:cNvSpPr/>
           <p:nvPr/>
         </p:nvSpPr>
         <p:spPr>
           <a:xfrm>
-            <a:off x="7452360" y="1892808"/>
-            <a:ext cx="3840480" cy="658368"/>
+            <a:off x="8257032" y="1207008"/>
+            <a:ext cx="841248" cy="310896"/>
           </a:xfrm>
           <a:prstGeom prst="roundRect">
             <a:avLst>
-              <a:gd name="adj" fmla="val 14000"/>
+              <a:gd name="adj" fmla="val 35000"/>
             </a:avLst>
           </a:prstGeom>
           <a:solidFill>
-            <a:srgbClr val="FFFFFF"/>
+            <a:srgbClr val="E5F5FB"/>
           </a:solidFill>
           <a:ln>
             <a:noFill/>
@@ -12151,40 +12254,31 @@
           </a:fontRef>
         </p:style>
         <p:txBody>
-          <a:bodyPr rtlCol="0" anchor="ctr" lIns="164592" wrap="square"/>
+          <a:bodyPr rtlCol="0" anchor="ctr"/>
           <a:lstStyle/>
           <a:p>
             <a:pPr algn="ctr"/>
-            <a:r>
-              <a:rPr sz="1500" b="1" i="0">
-                <a:solidFill>
-                  <a:srgbClr val="1A1A1A"/>
-                </a:solidFill>
-                <a:latin typeface="Arial"/>
-              </a:rPr>
-              <a:t>Tooling — chosen without lock-in</a:t>
-            </a:r>
-          </a:p>
-        </p:txBody>
-      </p:sp>
-      <p:sp>
-        <p:nvSpPr>
-          <p:cNvPr id="22" name="Rounded Rectangle 21"/>
+          </a:p>
+        </p:txBody>
+      </p:sp>
+      <p:sp>
+        <p:nvSpPr>
+          <p:cNvPr id="6" name="Rounded Rectangle 5"/>
           <p:cNvSpPr/>
           <p:nvPr/>
         </p:nvSpPr>
         <p:spPr>
           <a:xfrm>
-            <a:off x="7452360" y="2825496"/>
-            <a:ext cx="3840480" cy="658368"/>
+            <a:off x="9153144" y="1207008"/>
+            <a:ext cx="841248" cy="310896"/>
           </a:xfrm>
           <a:prstGeom prst="roundRect">
             <a:avLst>
-              <a:gd name="adj" fmla="val 14000"/>
+              <a:gd name="adj" fmla="val 35000"/>
             </a:avLst>
           </a:prstGeom>
           <a:solidFill>
-            <a:srgbClr val="FFFFFF"/>
+            <a:srgbClr val="E5F5FB"/>
           </a:solidFill>
           <a:ln>
             <a:noFill/>
@@ -12206,40 +12300,31 @@
           </a:fontRef>
         </p:style>
         <p:txBody>
-          <a:bodyPr rtlCol="0" anchor="ctr" lIns="164592" wrap="square"/>
+          <a:bodyPr rtlCol="0" anchor="ctr"/>
           <a:lstStyle/>
           <a:p>
             <a:pPr algn="ctr"/>
-            <a:r>
-              <a:rPr sz="1500" b="1" i="0">
-                <a:solidFill>
-                  <a:srgbClr val="1A1A1A"/>
-                </a:solidFill>
-                <a:latin typeface="Arial"/>
-              </a:rPr>
-              <a:t>Governance — a Board and a gate</a:t>
-            </a:r>
-          </a:p>
-        </p:txBody>
-      </p:sp>
-      <p:sp>
-        <p:nvSpPr>
-          <p:cNvPr id="23" name="Rounded Rectangle 22"/>
+          </a:p>
+        </p:txBody>
+      </p:sp>
+      <p:sp>
+        <p:nvSpPr>
+          <p:cNvPr id="7" name="Rounded Rectangle 6"/>
           <p:cNvSpPr/>
           <p:nvPr/>
         </p:nvSpPr>
         <p:spPr>
           <a:xfrm>
-            <a:off x="7452360" y="3758184"/>
-            <a:ext cx="3840480" cy="658368"/>
+            <a:off x="10049256" y="1207008"/>
+            <a:ext cx="841248" cy="310896"/>
           </a:xfrm>
           <a:prstGeom prst="roundRect">
             <a:avLst>
-              <a:gd name="adj" fmla="val 14000"/>
+              <a:gd name="adj" fmla="val 35000"/>
             </a:avLst>
           </a:prstGeom>
           <a:solidFill>
-            <a:srgbClr val="006E96"/>
+            <a:srgbClr val="E5F5FB"/>
           </a:solidFill>
           <a:ln>
             <a:noFill/>
@@ -12261,283 +12346,31 @@
           </a:fontRef>
         </p:style>
         <p:txBody>
-          <a:bodyPr rtlCol="0" anchor="ctr" lIns="164592" wrap="square"/>
+          <a:bodyPr rtlCol="0" anchor="ctr"/>
           <a:lstStyle/>
           <a:p>
             <a:pPr algn="ctr"/>
-            <a:r>
-              <a:rPr sz="1500" b="1" i="0">
-                <a:solidFill>
-                  <a:srgbClr val="FFFFFF"/>
-                </a:solidFill>
-                <a:latin typeface="Arial"/>
-              </a:rPr>
-              <a:t>Sustainment — alive past year two</a:t>
-            </a:r>
-          </a:p>
-        </p:txBody>
-      </p:sp>
-      <p:sp>
-        <p:nvSpPr>
-          <p:cNvPr id="24" name="TextBox 23"/>
-          <p:cNvSpPr txBox="1"/>
-          <p:nvPr/>
-        </p:nvSpPr>
-        <p:spPr>
-          <a:xfrm>
-            <a:off x="7452360" y="5806440"/>
-            <a:ext cx="4297680" cy="731520"/>
-          </a:xfrm>
-          <a:prstGeom prst="rect">
-            <a:avLst/>
-          </a:prstGeom>
-          <a:noFill/>
-        </p:spPr>
-        <p:txBody>
-          <a:bodyPr wrap="square">
-            <a:spAutoFit/>
-          </a:bodyPr>
-          <a:lstStyle/>
-          <a:p>
-            <a:r>
-              <a:rPr sz="1200" b="0" i="0">
-                <a:solidFill>
-                  <a:srgbClr val="FFFFFF"/>
-                </a:solidFill>
-                <a:latin typeface="Arial"/>
-              </a:rPr>
-              <a:t>5 gate questions · 4 health metrics · 4 ways a practice fades</a:t>
-            </a:r>
-          </a:p>
-        </p:txBody>
-      </p:sp>
-    </p:spTree>
-    <p:extLst>
-      <p:ext uri="{BB962C8B-B14F-4D97-AF65-F5344CB8AC3E}">
-        <p14:creationId xmlns:p14="http://schemas.microsoft.com/office/powerpoint/2010/main" val="1196800265"/>
-      </p:ext>
-    </p:extLst>
-  </p:cSld>
-  <p:clrMapOvr>
-    <a:masterClrMapping/>
-  </p:clrMapOvr>
-</p:sld>
-</file>
-
-<file path=ppt/slides/slide48.xml><?xml version="1.0" encoding="utf-8"?>
-<p:sld xmlns:a="http://schemas.openxmlformats.org/drawingml/2006/main" xmlns:p="http://schemas.openxmlformats.org/presentationml/2006/main" xmlns:r="http://schemas.openxmlformats.org/officeDocument/2006/relationships">
-  <p:cSld>
-    <p:spTree>
-      <p:nvGrpSpPr>
-        <p:cNvPr id="1" name=""/>
-        <p:cNvGrpSpPr/>
-        <p:nvPr/>
-      </p:nvGrpSpPr>
-      <p:grpSpPr/>
-      <p:sp>
-        <p:nvSpPr>
-          <p:cNvPr id="2" name="TextBox 1"/>
-          <p:cNvSpPr txBox="1"/>
-          <p:nvPr/>
-        </p:nvSpPr>
-        <p:spPr>
-          <a:xfrm>
-            <a:off x="822960" y="822960"/>
-            <a:ext cx="7315200" cy="457200"/>
-          </a:xfrm>
-          <a:prstGeom prst="rect">
-            <a:avLst/>
-          </a:prstGeom>
-          <a:noFill/>
-        </p:spPr>
-        <p:txBody>
-          <a:bodyPr wrap="square">
-            <a:spAutoFit/>
-          </a:bodyPr>
-          <a:lstStyle/>
-          <a:p>
-            <a:r>
-              <a:rPr sz="1200" b="1" i="0">
-                <a:solidFill>
-                  <a:srgbClr val="595959"/>
-                </a:solidFill>
-                <a:latin typeface="Arial"/>
-              </a:rPr>
-              <a:t>KP1 · MODULE 3 · VIDEO 3.7</a:t>
-            </a:r>
-          </a:p>
-        </p:txBody>
-      </p:sp>
-      <p:sp>
-        <p:nvSpPr>
-          <p:cNvPr id="3" name="TextBox 2"/>
-          <p:cNvSpPr txBox="1"/>
-          <p:nvPr/>
-        </p:nvSpPr>
-        <p:spPr>
-          <a:xfrm>
-            <a:off x="822960" y="1828800"/>
-            <a:ext cx="2011680" cy="1097280"/>
-          </a:xfrm>
-          <a:prstGeom prst="rect">
-            <a:avLst/>
-          </a:prstGeom>
-          <a:noFill/>
-        </p:spPr>
-        <p:txBody>
-          <a:bodyPr wrap="square">
-            <a:spAutoFit/>
-          </a:bodyPr>
-          <a:lstStyle/>
-          <a:p>
-            <a:r>
-              <a:rPr sz="6000" b="1" i="0">
-                <a:solidFill>
-                  <a:srgbClr val="009CD6"/>
-                </a:solidFill>
-                <a:latin typeface="Arial"/>
-              </a:rPr>
-              <a:t>3.7</a:t>
-            </a:r>
-          </a:p>
-        </p:txBody>
-      </p:sp>
-      <p:sp>
-        <p:nvSpPr>
-          <p:cNvPr id="4" name="TextBox 3"/>
-          <p:cNvSpPr txBox="1"/>
-          <p:nvPr/>
-        </p:nvSpPr>
-        <p:spPr>
-          <a:xfrm>
-            <a:off x="822960" y="2880360"/>
-            <a:ext cx="9601200" cy="1371600"/>
-          </a:xfrm>
-          <a:prstGeom prst="rect">
-            <a:avLst/>
-          </a:prstGeom>
-          <a:noFill/>
-        </p:spPr>
-        <p:txBody>
-          <a:bodyPr wrap="square">
-            <a:spAutoFit/>
-          </a:bodyPr>
-          <a:lstStyle/>
-          <a:p>
-            <a:r>
-              <a:rPr sz="3400" b="1" i="0">
-                <a:solidFill>
-                  <a:srgbClr val="1A1A1A"/>
-                </a:solidFill>
-                <a:latin typeface="Arial"/>
-              </a:rPr>
-              <a:t>Keep the practice alive past year two</a:t>
-            </a:r>
-          </a:p>
-        </p:txBody>
-      </p:sp>
-      <p:sp>
-        <p:nvSpPr>
-          <p:cNvPr id="5" name="TextBox 4"/>
-          <p:cNvSpPr txBox="1"/>
-          <p:nvPr/>
-        </p:nvSpPr>
-        <p:spPr>
-          <a:xfrm>
-            <a:off x="822960" y="4343400"/>
-            <a:ext cx="9875520" cy="1554480"/>
-          </a:xfrm>
-          <a:prstGeom prst="rect">
-            <a:avLst/>
-          </a:prstGeom>
-          <a:noFill/>
-        </p:spPr>
-        <p:txBody>
-          <a:bodyPr wrap="square">
-            <a:spAutoFit/>
-          </a:bodyPr>
-          <a:lstStyle/>
-          <a:p>
-            <a:r>
-              <a:rPr sz="1700" b="0" i="1">
-                <a:solidFill>
-                  <a:srgbClr val="595959"/>
-                </a:solidFill>
-                <a:latin typeface="Arial"/>
-              </a:rPr>
-              <a:t>EA programmes rarely fail technically; they fade — the team gets pulled away, the repository goes stale, the Board drifts to advisory, the sponsor changes. Naming these four fade-modes and the move that counters each is how you keep the practice alive.</a:t>
-            </a:r>
-          </a:p>
-        </p:txBody>
-      </p:sp>
-      <p:sp>
-        <p:nvSpPr>
-          <p:cNvPr id="6" name="TextBox 5"/>
-          <p:cNvSpPr txBox="1"/>
-          <p:nvPr/>
-        </p:nvSpPr>
-        <p:spPr>
-          <a:xfrm>
-            <a:off x="822960" y="5989320"/>
-            <a:ext cx="7315200" cy="365760"/>
-          </a:xfrm>
-          <a:prstGeom prst="rect">
-            <a:avLst/>
-          </a:prstGeom>
-          <a:noFill/>
-        </p:spPr>
-        <p:txBody>
-          <a:bodyPr wrap="square">
-            <a:spAutoFit/>
-          </a:bodyPr>
-          <a:lstStyle/>
-          <a:p>
-            <a:r>
-              <a:rPr sz="1200" b="0" i="0">
-                <a:solidFill>
-                  <a:srgbClr val="595959"/>
-                </a:solidFill>
-                <a:latin typeface="Arial"/>
-              </a:rPr>
-              <a:t>~5 minutes · standalone video · voice-over on text slides</a:t>
-            </a:r>
-          </a:p>
-        </p:txBody>
-      </p:sp>
-    </p:spTree>
-  </p:cSld>
-  <p:clrMapOvr>
-    <a:masterClrMapping/>
-  </p:clrMapOvr>
-</p:sld>
-</file>
-
-<file path=ppt/slides/slide49.xml><?xml version="1.0" encoding="utf-8"?>
-<p:sld xmlns:a="http://schemas.openxmlformats.org/drawingml/2006/main" xmlns:p="http://schemas.openxmlformats.org/presentationml/2006/main" xmlns:r="http://schemas.openxmlformats.org/officeDocument/2006/relationships">
-  <p:cSld>
-    <p:spTree>
-      <p:nvGrpSpPr>
-        <p:cNvPr id="1" name=""/>
-        <p:cNvGrpSpPr/>
-        <p:nvPr/>
-      </p:nvGrpSpPr>
-      <p:grpSpPr/>
-      <p:sp>
-        <p:nvSpPr>
-          <p:cNvPr id="2" name="Rectangle 1"/>
+          </a:p>
+        </p:txBody>
+      </p:sp>
+      <p:sp>
+        <p:nvSpPr>
+          <p:cNvPr id="8" name="Rounded Rectangle 7"/>
           <p:cNvSpPr/>
           <p:nvPr/>
         </p:nvSpPr>
         <p:spPr>
           <a:xfrm>
-            <a:off x="457200" y="384048"/>
-            <a:ext cx="45720" cy="256032"/>
-          </a:xfrm>
-          <a:prstGeom prst="rect">
-            <a:avLst/>
+            <a:off x="658368" y="1691640"/>
+            <a:ext cx="10881360" cy="1920240"/>
+          </a:xfrm>
+          <a:prstGeom prst="roundRect">
+            <a:avLst>
+              <a:gd name="adj" fmla="val 4500"/>
+            </a:avLst>
           </a:prstGeom>
           <a:solidFill>
-            <a:srgbClr val="009CD6"/>
+            <a:srgbClr val="E5F5FB"/>
           </a:solidFill>
           <a:ln>
             <a:noFill/>
@@ -12568,14 +12401,14 @@
       </p:sp>
       <p:sp>
         <p:nvSpPr>
-          <p:cNvPr id="3" name="TextBox 2"/>
+          <p:cNvPr id="9" name="TextBox 8"/>
           <p:cNvSpPr txBox="1"/>
           <p:nvPr/>
         </p:nvSpPr>
         <p:spPr>
           <a:xfrm>
-            <a:off x="621792" y="274320"/>
-            <a:ext cx="11247120" cy="914400"/>
+            <a:off x="868680" y="1874520"/>
+            <a:ext cx="2286000" cy="365760"/>
           </a:xfrm>
           <a:prstGeom prst="rect">
             <a:avLst/>
@@ -12589,31 +12422,65 @@
           <a:lstStyle/>
           <a:p>
             <a:r>
-              <a:rPr sz="2800" b="1" i="0">
+              <a:rPr sz="1100" b="1" i="0">
+                <a:solidFill>
+                  <a:srgbClr val="006E96"/>
+                </a:solidFill>
+                <a:latin typeface="Arial"/>
+              </a:rPr>
+              <a:t>HOW IT FADES</a:t>
+            </a:r>
+          </a:p>
+        </p:txBody>
+      </p:sp>
+      <p:sp>
+        <p:nvSpPr>
+          <p:cNvPr id="10" name="TextBox 9"/>
+          <p:cNvSpPr txBox="1"/>
+          <p:nvPr/>
+        </p:nvSpPr>
+        <p:spPr>
+          <a:xfrm>
+            <a:off x="3200400" y="1847088"/>
+            <a:ext cx="8092440" cy="1600200"/>
+          </a:xfrm>
+          <a:prstGeom prst="rect">
+            <a:avLst/>
+          </a:prstGeom>
+          <a:noFill/>
+        </p:spPr>
+        <p:txBody>
+          <a:bodyPr wrap="square">
+            <a:spAutoFit/>
+          </a:bodyPr>
+          <a:lstStyle/>
+          <a:p>
+            <a:r>
+              <a:rPr sz="1800" b="0" i="0">
                 <a:solidFill>
                   <a:srgbClr val="1A1A1A"/>
                 </a:solidFill>
                 <a:latin typeface="Arial"/>
               </a:rPr>
-              <a:t>Fade one — your architects are the obvious people to second to the crisis</a:t>
-            </a:r>
-          </a:p>
-        </p:txBody>
-      </p:sp>
-      <p:sp>
-        <p:nvSpPr>
-          <p:cNvPr id="4" name="Rounded Rectangle 3"/>
+              <a:t>A flagship programme runs into trouble and needs skilled people. Your architects go “just for a few months”, and the architecture work stops. This is the most common way EA programmes die.</a:t>
+            </a:r>
+          </a:p>
+        </p:txBody>
+      </p:sp>
+      <p:sp>
+        <p:nvSpPr>
+          <p:cNvPr id="11" name="Rounded Rectangle 10"/>
           <p:cNvSpPr/>
           <p:nvPr/>
         </p:nvSpPr>
         <p:spPr>
           <a:xfrm>
-            <a:off x="7360920" y="1207008"/>
-            <a:ext cx="841248" cy="310896"/>
+            <a:off x="658368" y="3931920"/>
+            <a:ext cx="10881360" cy="1920240"/>
           </a:xfrm>
           <a:prstGeom prst="roundRect">
             <a:avLst>
-              <a:gd name="adj" fmla="val 35000"/>
+              <a:gd name="adj" fmla="val 4500"/>
             </a:avLst>
           </a:prstGeom>
           <a:solidFill>
@@ -12648,22 +12515,140 @@
       </p:sp>
       <p:sp>
         <p:nvSpPr>
-          <p:cNvPr id="5" name="Rounded Rectangle 4"/>
+          <p:cNvPr id="12" name="TextBox 11"/>
+          <p:cNvSpPr txBox="1"/>
+          <p:nvPr/>
+        </p:nvSpPr>
+        <p:spPr>
+          <a:xfrm>
+            <a:off x="868680" y="4114800"/>
+            <a:ext cx="2286000" cy="365760"/>
+          </a:xfrm>
+          <a:prstGeom prst="rect">
+            <a:avLst/>
+          </a:prstGeom>
+          <a:noFill/>
+        </p:spPr>
+        <p:txBody>
+          <a:bodyPr wrap="square">
+            <a:spAutoFit/>
+          </a:bodyPr>
+          <a:lstStyle/>
+          <a:p>
+            <a:r>
+              <a:rPr sz="1100" b="1" i="0">
+                <a:solidFill>
+                  <a:srgbClr val="FFFFFF"/>
+                </a:solidFill>
+                <a:latin typeface="Arial"/>
+              </a:rPr>
+              <a:t>THE COUNTER</a:t>
+            </a:r>
+          </a:p>
+        </p:txBody>
+      </p:sp>
+      <p:sp>
+        <p:nvSpPr>
+          <p:cNvPr id="13" name="TextBox 12"/>
+          <p:cNvSpPr txBox="1"/>
+          <p:nvPr/>
+        </p:nvSpPr>
+        <p:spPr>
+          <a:xfrm>
+            <a:off x="3200400" y="4087368"/>
+            <a:ext cx="8092440" cy="1600200"/>
+          </a:xfrm>
+          <a:prstGeom prst="rect">
+            <a:avLst/>
+          </a:prstGeom>
+          <a:noFill/>
+        </p:spPr>
+        <p:txBody>
+          <a:bodyPr wrap="square">
+            <a:spAutoFit/>
+          </a:bodyPr>
+          <a:lstStyle/>
+          <a:p>
+            <a:r>
+              <a:rPr sz="1800" b="0" i="0">
+                <a:solidFill>
+                  <a:srgbClr val="FFFFFF"/>
+                </a:solidFill>
+                <a:latin typeface="Arial"/>
+              </a:rPr>
+              <a:t>A written protection promise — an explicit commitment that the EA team will not be pulled onto the urgent project of the week — recommitted whenever the minister or the sponsor changes.</a:t>
+            </a:r>
+          </a:p>
+        </p:txBody>
+      </p:sp>
+      <p:sp>
+        <p:nvSpPr>
+          <p:cNvPr id="14" name="TextBox 13"/>
+          <p:cNvSpPr txBox="1"/>
+          <p:nvPr/>
+        </p:nvSpPr>
+        <p:spPr>
+          <a:xfrm>
+            <a:off x="457200" y="6473952"/>
+            <a:ext cx="7772400" cy="292608"/>
+          </a:xfrm>
+          <a:prstGeom prst="rect">
+            <a:avLst/>
+          </a:prstGeom>
+          <a:noFill/>
+        </p:spPr>
+        <p:txBody>
+          <a:bodyPr wrap="square">
+            <a:spAutoFit/>
+          </a:bodyPr>
+          <a:lstStyle/>
+          <a:p>
+            <a:r>
+              <a:rPr sz="900" b="0" i="0">
+                <a:solidFill>
+                  <a:srgbClr val="595959"/>
+                </a:solidFill>
+                <a:latin typeface="Arial"/>
+              </a:rPr>
+              <a:t>3.7 · Keep the practice alive past year two</a:t>
+            </a:r>
+          </a:p>
+        </p:txBody>
+      </p:sp>
+    </p:spTree>
+  </p:cSld>
+  <p:clrMapOvr>
+    <a:masterClrMapping/>
+  </p:clrMapOvr>
+</p:sld>
+</file>
+
+<file path=ppt/slides/slide57.xml><?xml version="1.0" encoding="utf-8"?>
+<p:sld xmlns:a="http://schemas.openxmlformats.org/drawingml/2006/main" xmlns:p="http://schemas.openxmlformats.org/presentationml/2006/main" xmlns:r="http://schemas.openxmlformats.org/officeDocument/2006/relationships">
+  <p:cSld>
+    <p:spTree>
+      <p:nvGrpSpPr>
+        <p:cNvPr id="1" name=""/>
+        <p:cNvGrpSpPr/>
+        <p:nvPr/>
+      </p:nvGrpSpPr>
+      <p:grpSpPr/>
+      <p:sp>
+        <p:nvSpPr>
+          <p:cNvPr id="2" name="Rectangle 1"/>
           <p:cNvSpPr/>
           <p:nvPr/>
         </p:nvSpPr>
         <p:spPr>
           <a:xfrm>
-            <a:off x="8257032" y="1207008"/>
-            <a:ext cx="841248" cy="310896"/>
-          </a:xfrm>
-          <a:prstGeom prst="roundRect">
-            <a:avLst>
-              <a:gd name="adj" fmla="val 35000"/>
-            </a:avLst>
+            <a:off x="457200" y="384048"/>
+            <a:ext cx="45720" cy="256032"/>
+          </a:xfrm>
+          <a:prstGeom prst="rect">
+            <a:avLst/>
           </a:prstGeom>
           <a:solidFill>
-            <a:srgbClr val="E5F5FB"/>
+            <a:srgbClr val="009CD6"/>
           </a:solidFill>
           <a:ln>
             <a:noFill/>
@@ -12694,13 +12679,47 @@
       </p:sp>
       <p:sp>
         <p:nvSpPr>
-          <p:cNvPr id="6" name="Rounded Rectangle 5"/>
+          <p:cNvPr id="3" name="TextBox 2"/>
+          <p:cNvSpPr txBox="1"/>
+          <p:nvPr/>
+        </p:nvSpPr>
+        <p:spPr>
+          <a:xfrm>
+            <a:off x="621792" y="274320"/>
+            <a:ext cx="11247120" cy="914400"/>
+          </a:xfrm>
+          <a:prstGeom prst="rect">
+            <a:avLst/>
+          </a:prstGeom>
+          <a:noFill/>
+        </p:spPr>
+        <p:txBody>
+          <a:bodyPr wrap="square">
+            <a:spAutoFit/>
+          </a:bodyPr>
+          <a:lstStyle/>
+          <a:p>
+            <a:r>
+              <a:rPr sz="2800" b="1" i="0">
+                <a:solidFill>
+                  <a:srgbClr val="1A1A1A"/>
+                </a:solidFill>
+                <a:latin typeface="Arial"/>
+              </a:rPr>
+              <a:t>Fade two — an unused repository is a dead one</a:t>
+            </a:r>
+          </a:p>
+        </p:txBody>
+      </p:sp>
+      <p:sp>
+        <p:nvSpPr>
+          <p:cNvPr id="4" name="Rounded Rectangle 3"/>
           <p:cNvSpPr/>
           <p:nvPr/>
         </p:nvSpPr>
         <p:spPr>
           <a:xfrm>
-            <a:off x="9153144" y="1207008"/>
+            <a:off x="7360920" y="1207008"/>
             <a:ext cx="841248" cy="310896"/>
           </a:xfrm>
           <a:prstGeom prst="roundRect">
@@ -12740,13 +12759,13 @@
       </p:sp>
       <p:sp>
         <p:nvSpPr>
-          <p:cNvPr id="7" name="Rounded Rectangle 6"/>
+          <p:cNvPr id="5" name="Rounded Rectangle 4"/>
           <p:cNvSpPr/>
           <p:nvPr/>
         </p:nvSpPr>
         <p:spPr>
           <a:xfrm>
-            <a:off x="10049256" y="1207008"/>
+            <a:off x="8257032" y="1207008"/>
             <a:ext cx="841248" cy="310896"/>
           </a:xfrm>
           <a:prstGeom prst="roundRect">
@@ -12755,7 +12774,7 @@
             </a:avLst>
           </a:prstGeom>
           <a:solidFill>
-            <a:srgbClr val="E5F5FB"/>
+            <a:srgbClr val="009CD6"/>
           </a:solidFill>
           <a:ln>
             <a:noFill/>
@@ -12786,18 +12805,18 @@
       </p:sp>
       <p:sp>
         <p:nvSpPr>
-          <p:cNvPr id="8" name="Rounded Rectangle 7"/>
+          <p:cNvPr id="6" name="Rounded Rectangle 5"/>
           <p:cNvSpPr/>
           <p:nvPr/>
         </p:nvSpPr>
         <p:spPr>
           <a:xfrm>
-            <a:off x="658368" y="1691640"/>
-            <a:ext cx="10881360" cy="1920240"/>
+            <a:off x="9153144" y="1207008"/>
+            <a:ext cx="841248" cy="310896"/>
           </a:xfrm>
           <a:prstGeom prst="roundRect">
             <a:avLst>
-              <a:gd name="adj" fmla="val 4500"/>
+              <a:gd name="adj" fmla="val 35000"/>
             </a:avLst>
           </a:prstGeom>
           <a:solidFill>
@@ -12832,90 +12851,22 @@
       </p:sp>
       <p:sp>
         <p:nvSpPr>
-          <p:cNvPr id="9" name="TextBox 8"/>
-          <p:cNvSpPr txBox="1"/>
-          <p:nvPr/>
-        </p:nvSpPr>
-        <p:spPr>
-          <a:xfrm>
-            <a:off x="868680" y="1874520"/>
-            <a:ext cx="2286000" cy="365760"/>
-          </a:xfrm>
-          <a:prstGeom prst="rect">
-            <a:avLst/>
-          </a:prstGeom>
-          <a:noFill/>
-        </p:spPr>
-        <p:txBody>
-          <a:bodyPr wrap="square">
-            <a:spAutoFit/>
-          </a:bodyPr>
-          <a:lstStyle/>
-          <a:p>
-            <a:r>
-              <a:rPr sz="1100" b="1" i="0">
-                <a:solidFill>
-                  <a:srgbClr val="006E96"/>
-                </a:solidFill>
-                <a:latin typeface="Arial"/>
-              </a:rPr>
-              <a:t>HOW IT FADES</a:t>
-            </a:r>
-          </a:p>
-        </p:txBody>
-      </p:sp>
-      <p:sp>
-        <p:nvSpPr>
-          <p:cNvPr id="10" name="TextBox 9"/>
-          <p:cNvSpPr txBox="1"/>
-          <p:nvPr/>
-        </p:nvSpPr>
-        <p:spPr>
-          <a:xfrm>
-            <a:off x="3200400" y="1847088"/>
-            <a:ext cx="8092440" cy="1600200"/>
-          </a:xfrm>
-          <a:prstGeom prst="rect">
-            <a:avLst/>
-          </a:prstGeom>
-          <a:noFill/>
-        </p:spPr>
-        <p:txBody>
-          <a:bodyPr wrap="square">
-            <a:spAutoFit/>
-          </a:bodyPr>
-          <a:lstStyle/>
-          <a:p>
-            <a:r>
-              <a:rPr sz="1800" b="0" i="0">
-                <a:solidFill>
-                  <a:srgbClr val="1A1A1A"/>
-                </a:solidFill>
-                <a:latin typeface="Arial"/>
-              </a:rPr>
-              <a:t>A flagship programme runs into trouble and needs skilled people. Your architects go “just for a few months”, and the architecture work stops. This is the most common way EA programmes die.</a:t>
-            </a:r>
-          </a:p>
-        </p:txBody>
-      </p:sp>
-      <p:sp>
-        <p:nvSpPr>
-          <p:cNvPr id="11" name="Rounded Rectangle 10"/>
+          <p:cNvPr id="7" name="Rounded Rectangle 6"/>
           <p:cNvSpPr/>
           <p:nvPr/>
         </p:nvSpPr>
         <p:spPr>
           <a:xfrm>
-            <a:off x="658368" y="3931920"/>
-            <a:ext cx="10881360" cy="1920240"/>
+            <a:off x="10049256" y="1207008"/>
+            <a:ext cx="841248" cy="310896"/>
           </a:xfrm>
           <a:prstGeom prst="roundRect">
             <a:avLst>
-              <a:gd name="adj" fmla="val 4500"/>
+              <a:gd name="adj" fmla="val 35000"/>
             </a:avLst>
           </a:prstGeom>
           <a:solidFill>
-            <a:srgbClr val="009CD6"/>
+            <a:srgbClr val="E5F5FB"/>
           </a:solidFill>
           <a:ln>
             <a:noFill/>
@@ -12946,140 +12897,22 @@
       </p:sp>
       <p:sp>
         <p:nvSpPr>
-          <p:cNvPr id="12" name="TextBox 11"/>
-          <p:cNvSpPr txBox="1"/>
-          <p:nvPr/>
-        </p:nvSpPr>
-        <p:spPr>
-          <a:xfrm>
-            <a:off x="868680" y="4114800"/>
-            <a:ext cx="2286000" cy="365760"/>
-          </a:xfrm>
-          <a:prstGeom prst="rect">
-            <a:avLst/>
-          </a:prstGeom>
-          <a:noFill/>
-        </p:spPr>
-        <p:txBody>
-          <a:bodyPr wrap="square">
-            <a:spAutoFit/>
-          </a:bodyPr>
-          <a:lstStyle/>
-          <a:p>
-            <a:r>
-              <a:rPr sz="1100" b="1" i="0">
-                <a:solidFill>
-                  <a:srgbClr val="FFFFFF"/>
-                </a:solidFill>
-                <a:latin typeface="Arial"/>
-              </a:rPr>
-              <a:t>THE COUNTER</a:t>
-            </a:r>
-          </a:p>
-        </p:txBody>
-      </p:sp>
-      <p:sp>
-        <p:nvSpPr>
-          <p:cNvPr id="13" name="TextBox 12"/>
-          <p:cNvSpPr txBox="1"/>
-          <p:nvPr/>
-        </p:nvSpPr>
-        <p:spPr>
-          <a:xfrm>
-            <a:off x="3200400" y="4087368"/>
-            <a:ext cx="8092440" cy="1600200"/>
-          </a:xfrm>
-          <a:prstGeom prst="rect">
-            <a:avLst/>
-          </a:prstGeom>
-          <a:noFill/>
-        </p:spPr>
-        <p:txBody>
-          <a:bodyPr wrap="square">
-            <a:spAutoFit/>
-          </a:bodyPr>
-          <a:lstStyle/>
-          <a:p>
-            <a:r>
-              <a:rPr sz="1800" b="0" i="0">
-                <a:solidFill>
-                  <a:srgbClr val="FFFFFF"/>
-                </a:solidFill>
-                <a:latin typeface="Arial"/>
-              </a:rPr>
-              <a:t>A written protection promise — an explicit commitment that the EA team will not be pulled onto the urgent project of the week — recommitted whenever the minister or the sponsor changes.</a:t>
-            </a:r>
-          </a:p>
-        </p:txBody>
-      </p:sp>
-      <p:sp>
-        <p:nvSpPr>
-          <p:cNvPr id="14" name="TextBox 13"/>
-          <p:cNvSpPr txBox="1"/>
-          <p:nvPr/>
-        </p:nvSpPr>
-        <p:spPr>
-          <a:xfrm>
-            <a:off x="457200" y="6473952"/>
-            <a:ext cx="7772400" cy="292608"/>
-          </a:xfrm>
-          <a:prstGeom prst="rect">
-            <a:avLst/>
-          </a:prstGeom>
-          <a:noFill/>
-        </p:spPr>
-        <p:txBody>
-          <a:bodyPr wrap="square">
-            <a:spAutoFit/>
-          </a:bodyPr>
-          <a:lstStyle/>
-          <a:p>
-            <a:r>
-              <a:rPr sz="900" b="0" i="0">
-                <a:solidFill>
-                  <a:srgbClr val="595959"/>
-                </a:solidFill>
-                <a:latin typeface="Arial"/>
-              </a:rPr>
-              <a:t>3.7 · Keep the practice alive past year two</a:t>
-            </a:r>
-          </a:p>
-        </p:txBody>
-      </p:sp>
-    </p:spTree>
-  </p:cSld>
-  <p:clrMapOvr>
-    <a:masterClrMapping/>
-  </p:clrMapOvr>
-</p:sld>
-</file>
-
-<file path=ppt/slides/slide50.xml><?xml version="1.0" encoding="utf-8"?>
-<p:sld xmlns:a="http://schemas.openxmlformats.org/drawingml/2006/main" xmlns:p="http://schemas.openxmlformats.org/presentationml/2006/main" xmlns:r="http://schemas.openxmlformats.org/officeDocument/2006/relationships">
-  <p:cSld>
-    <p:spTree>
-      <p:nvGrpSpPr>
-        <p:cNvPr id="1" name=""/>
-        <p:cNvGrpSpPr/>
-        <p:nvPr/>
-      </p:nvGrpSpPr>
-      <p:grpSpPr/>
-      <p:sp>
-        <p:nvSpPr>
-          <p:cNvPr id="2" name="Rectangle 1"/>
+          <p:cNvPr id="8" name="Rounded Rectangle 7"/>
           <p:cNvSpPr/>
           <p:nvPr/>
         </p:nvSpPr>
         <p:spPr>
           <a:xfrm>
-            <a:off x="457200" y="384048"/>
-            <a:ext cx="45720" cy="256032"/>
-          </a:xfrm>
-          <a:prstGeom prst="rect">
-            <a:avLst/>
+            <a:off x="658368" y="1691640"/>
+            <a:ext cx="10881360" cy="1920240"/>
+          </a:xfrm>
+          <a:prstGeom prst="roundRect">
+            <a:avLst>
+              <a:gd name="adj" fmla="val 4500"/>
+            </a:avLst>
           </a:prstGeom>
           <a:solidFill>
-            <a:srgbClr val="009CD6"/>
+            <a:srgbClr val="E5F5FB"/>
           </a:solidFill>
           <a:ln>
             <a:noFill/>
@@ -13110,14 +12943,14 @@
       </p:sp>
       <p:sp>
         <p:nvSpPr>
-          <p:cNvPr id="3" name="TextBox 2"/>
+          <p:cNvPr id="9" name="TextBox 8"/>
           <p:cNvSpPr txBox="1"/>
           <p:nvPr/>
         </p:nvSpPr>
         <p:spPr>
           <a:xfrm>
-            <a:off x="621792" y="274320"/>
-            <a:ext cx="11247120" cy="914400"/>
+            <a:off x="868680" y="1874520"/>
+            <a:ext cx="2286000" cy="365760"/>
           </a:xfrm>
           <a:prstGeom prst="rect">
             <a:avLst/>
@@ -13131,35 +12964,69 @@
           <a:lstStyle/>
           <a:p>
             <a:r>
-              <a:rPr sz="2800" b="1" i="0">
+              <a:rPr sz="1100" b="1" i="0">
+                <a:solidFill>
+                  <a:srgbClr val="006E96"/>
+                </a:solidFill>
+                <a:latin typeface="Arial"/>
+              </a:rPr>
+              <a:t>HOW IT FADES</a:t>
+            </a:r>
+          </a:p>
+        </p:txBody>
+      </p:sp>
+      <p:sp>
+        <p:nvSpPr>
+          <p:cNvPr id="10" name="TextBox 9"/>
+          <p:cNvSpPr txBox="1"/>
+          <p:nvPr/>
+        </p:nvSpPr>
+        <p:spPr>
+          <a:xfrm>
+            <a:off x="3200400" y="1847088"/>
+            <a:ext cx="8092440" cy="1600200"/>
+          </a:xfrm>
+          <a:prstGeom prst="rect">
+            <a:avLst/>
+          </a:prstGeom>
+          <a:noFill/>
+        </p:spPr>
+        <p:txBody>
+          <a:bodyPr wrap="square">
+            <a:spAutoFit/>
+          </a:bodyPr>
+          <a:lstStyle/>
+          <a:p>
+            <a:r>
+              <a:rPr sz="1800" b="0" i="0">
                 <a:solidFill>
                   <a:srgbClr val="1A1A1A"/>
                 </a:solidFill>
                 <a:latin typeface="Arial"/>
               </a:rPr>
-              <a:t>Fade two — an unused repository is a dead one</a:t>
-            </a:r>
-          </a:p>
-        </p:txBody>
-      </p:sp>
-      <p:sp>
-        <p:nvSpPr>
-          <p:cNvPr id="4" name="Rounded Rectangle 3"/>
+              <a:t>Updates slip during a busy quarter. The picture drifts from reality. Someone relies on it, gets burned, and word spreads that the repository cannot be trusted. Once trust goes, people stop using it.</a:t>
+            </a:r>
+          </a:p>
+        </p:txBody>
+      </p:sp>
+      <p:sp>
+        <p:nvSpPr>
+          <p:cNvPr id="11" name="Rounded Rectangle 10"/>
           <p:cNvSpPr/>
           <p:nvPr/>
         </p:nvSpPr>
         <p:spPr>
           <a:xfrm>
-            <a:off x="7360920" y="1207008"/>
-            <a:ext cx="841248" cy="310896"/>
+            <a:off x="658368" y="3931920"/>
+            <a:ext cx="10881360" cy="1920240"/>
           </a:xfrm>
           <a:prstGeom prst="roundRect">
             <a:avLst>
-              <a:gd name="adj" fmla="val 35000"/>
+              <a:gd name="adj" fmla="val 4500"/>
             </a:avLst>
           </a:prstGeom>
           <a:solidFill>
-            <a:srgbClr val="E5F5FB"/>
+            <a:srgbClr val="009CD6"/>
           </a:solidFill>
           <a:ln>
             <a:noFill/>
@@ -13190,19 +13057,137 @@
       </p:sp>
       <p:sp>
         <p:nvSpPr>
-          <p:cNvPr id="5" name="Rounded Rectangle 4"/>
+          <p:cNvPr id="12" name="TextBox 11"/>
+          <p:cNvSpPr txBox="1"/>
+          <p:nvPr/>
+        </p:nvSpPr>
+        <p:spPr>
+          <a:xfrm>
+            <a:off x="868680" y="4114800"/>
+            <a:ext cx="2286000" cy="365760"/>
+          </a:xfrm>
+          <a:prstGeom prst="rect">
+            <a:avLst/>
+          </a:prstGeom>
+          <a:noFill/>
+        </p:spPr>
+        <p:txBody>
+          <a:bodyPr wrap="square">
+            <a:spAutoFit/>
+          </a:bodyPr>
+          <a:lstStyle/>
+          <a:p>
+            <a:r>
+              <a:rPr sz="1100" b="1" i="0">
+                <a:solidFill>
+                  <a:srgbClr val="FFFFFF"/>
+                </a:solidFill>
+                <a:latin typeface="Arial"/>
+              </a:rPr>
+              <a:t>THE COUNTER</a:t>
+            </a:r>
+          </a:p>
+        </p:txBody>
+      </p:sp>
+      <p:sp>
+        <p:nvSpPr>
+          <p:cNvPr id="13" name="TextBox 12"/>
+          <p:cNvSpPr txBox="1"/>
+          <p:nvPr/>
+        </p:nvSpPr>
+        <p:spPr>
+          <a:xfrm>
+            <a:off x="3200400" y="4087368"/>
+            <a:ext cx="8092440" cy="1600200"/>
+          </a:xfrm>
+          <a:prstGeom prst="rect">
+            <a:avLst/>
+          </a:prstGeom>
+          <a:noFill/>
+        </p:spPr>
+        <p:txBody>
+          <a:bodyPr wrap="square">
+            <a:spAutoFit/>
+          </a:bodyPr>
+          <a:lstStyle/>
+          <a:p>
+            <a:r>
+              <a:rPr sz="1800" b="0" i="0">
+                <a:solidFill>
+                  <a:srgbClr val="FFFFFF"/>
+                </a:solidFill>
+                <a:latin typeface="Arial"/>
+              </a:rPr>
+              <a:t>The update discipline: one named owner accountable for currency, updates tied to real events and to the review gate — so the repository stays true as a by-product of work that happens anyway.</a:t>
+            </a:r>
+          </a:p>
+        </p:txBody>
+      </p:sp>
+      <p:sp>
+        <p:nvSpPr>
+          <p:cNvPr id="14" name="TextBox 13"/>
+          <p:cNvSpPr txBox="1"/>
+          <p:nvPr/>
+        </p:nvSpPr>
+        <p:spPr>
+          <a:xfrm>
+            <a:off x="457200" y="6473952"/>
+            <a:ext cx="7772400" cy="292608"/>
+          </a:xfrm>
+          <a:prstGeom prst="rect">
+            <a:avLst/>
+          </a:prstGeom>
+          <a:noFill/>
+        </p:spPr>
+        <p:txBody>
+          <a:bodyPr wrap="square">
+            <a:spAutoFit/>
+          </a:bodyPr>
+          <a:lstStyle/>
+          <a:p>
+            <a:r>
+              <a:rPr sz="900" b="0" i="0">
+                <a:solidFill>
+                  <a:srgbClr val="595959"/>
+                </a:solidFill>
+                <a:latin typeface="Arial"/>
+              </a:rPr>
+              <a:t>3.7 · Keep the practice alive past year two</a:t>
+            </a:r>
+          </a:p>
+        </p:txBody>
+      </p:sp>
+    </p:spTree>
+  </p:cSld>
+  <p:clrMapOvr>
+    <a:masterClrMapping/>
+  </p:clrMapOvr>
+</p:sld>
+</file>
+
+<file path=ppt/slides/slide58.xml><?xml version="1.0" encoding="utf-8"?>
+<p:sld xmlns:a="http://schemas.openxmlformats.org/drawingml/2006/main" xmlns:p="http://schemas.openxmlformats.org/presentationml/2006/main" xmlns:r="http://schemas.openxmlformats.org/officeDocument/2006/relationships">
+  <p:cSld>
+    <p:spTree>
+      <p:nvGrpSpPr>
+        <p:cNvPr id="1" name=""/>
+        <p:cNvGrpSpPr/>
+        <p:nvPr/>
+      </p:nvGrpSpPr>
+      <p:grpSpPr/>
+      <p:sp>
+        <p:nvSpPr>
+          <p:cNvPr id="2" name="Rectangle 1"/>
           <p:cNvSpPr/>
           <p:nvPr/>
         </p:nvSpPr>
         <p:spPr>
           <a:xfrm>
-            <a:off x="8257032" y="1207008"/>
-            <a:ext cx="841248" cy="310896"/>
-          </a:xfrm>
-          <a:prstGeom prst="roundRect">
-            <a:avLst>
-              <a:gd name="adj" fmla="val 35000"/>
-            </a:avLst>
+            <a:off x="457200" y="384048"/>
+            <a:ext cx="45720" cy="256032"/>
+          </a:xfrm>
+          <a:prstGeom prst="rect">
+            <a:avLst/>
           </a:prstGeom>
           <a:solidFill>
             <a:srgbClr val="009CD6"/>
@@ -13236,13 +13221,47 @@
       </p:sp>
       <p:sp>
         <p:nvSpPr>
-          <p:cNvPr id="6" name="Rounded Rectangle 5"/>
+          <p:cNvPr id="3" name="TextBox 2"/>
+          <p:cNvSpPr txBox="1"/>
+          <p:nvPr/>
+        </p:nvSpPr>
+        <p:spPr>
+          <a:xfrm>
+            <a:off x="621792" y="274320"/>
+            <a:ext cx="11247120" cy="914400"/>
+          </a:xfrm>
+          <a:prstGeom prst="rect">
+            <a:avLst/>
+          </a:prstGeom>
+          <a:noFill/>
+        </p:spPr>
+        <p:txBody>
+          <a:bodyPr wrap="square">
+            <a:spAutoFit/>
+          </a:bodyPr>
+          <a:lstStyle/>
+          <a:p>
+            <a:r>
+              <a:rPr sz="2800" b="1" i="0">
+                <a:solidFill>
+                  <a:srgbClr val="1A1A1A"/>
+                </a:solidFill>
+                <a:latin typeface="Arial"/>
+              </a:rPr>
+              <a:t>Fade three — a Board overruled in silence is a Board being dismantled</a:t>
+            </a:r>
+          </a:p>
+        </p:txBody>
+      </p:sp>
+      <p:sp>
+        <p:nvSpPr>
+          <p:cNvPr id="4" name="Rounded Rectangle 3"/>
           <p:cNvSpPr/>
           <p:nvPr/>
         </p:nvSpPr>
         <p:spPr>
           <a:xfrm>
-            <a:off x="9153144" y="1207008"/>
+            <a:off x="7360920" y="1207008"/>
             <a:ext cx="841248" cy="310896"/>
           </a:xfrm>
           <a:prstGeom prst="roundRect">
@@ -13282,13 +13301,13 @@
       </p:sp>
       <p:sp>
         <p:nvSpPr>
-          <p:cNvPr id="7" name="Rounded Rectangle 6"/>
+          <p:cNvPr id="5" name="Rounded Rectangle 4"/>
           <p:cNvSpPr/>
           <p:nvPr/>
         </p:nvSpPr>
         <p:spPr>
           <a:xfrm>
-            <a:off x="10049256" y="1207008"/>
+            <a:off x="8257032" y="1207008"/>
             <a:ext cx="841248" cy="310896"/>
           </a:xfrm>
           <a:prstGeom prst="roundRect">
@@ -13328,22 +13347,22 @@
       </p:sp>
       <p:sp>
         <p:nvSpPr>
-          <p:cNvPr id="8" name="Rounded Rectangle 7"/>
+          <p:cNvPr id="6" name="Rounded Rectangle 5"/>
           <p:cNvSpPr/>
           <p:nvPr/>
         </p:nvSpPr>
         <p:spPr>
           <a:xfrm>
-            <a:off x="658368" y="1691640"/>
-            <a:ext cx="10881360" cy="1920240"/>
+            <a:off x="9153144" y="1207008"/>
+            <a:ext cx="841248" cy="310896"/>
           </a:xfrm>
           <a:prstGeom prst="roundRect">
             <a:avLst>
-              <a:gd name="adj" fmla="val 4500"/>
+              <a:gd name="adj" fmla="val 35000"/>
             </a:avLst>
           </a:prstGeom>
           <a:solidFill>
-            <a:srgbClr val="E5F5FB"/>
+            <a:srgbClr val="009CD6"/>
           </a:solidFill>
           <a:ln>
             <a:noFill/>
@@ -13374,90 +13393,22 @@
       </p:sp>
       <p:sp>
         <p:nvSpPr>
-          <p:cNvPr id="9" name="TextBox 8"/>
-          <p:cNvSpPr txBox="1"/>
-          <p:nvPr/>
-        </p:nvSpPr>
-        <p:spPr>
-          <a:xfrm>
-            <a:off x="868680" y="1874520"/>
-            <a:ext cx="2286000" cy="365760"/>
-          </a:xfrm>
-          <a:prstGeom prst="rect">
-            <a:avLst/>
-          </a:prstGeom>
-          <a:noFill/>
-        </p:spPr>
-        <p:txBody>
-          <a:bodyPr wrap="square">
-            <a:spAutoFit/>
-          </a:bodyPr>
-          <a:lstStyle/>
-          <a:p>
-            <a:r>
-              <a:rPr sz="1100" b="1" i="0">
-                <a:solidFill>
-                  <a:srgbClr val="006E96"/>
-                </a:solidFill>
-                <a:latin typeface="Arial"/>
-              </a:rPr>
-              <a:t>HOW IT FADES</a:t>
-            </a:r>
-          </a:p>
-        </p:txBody>
-      </p:sp>
-      <p:sp>
-        <p:nvSpPr>
-          <p:cNvPr id="10" name="TextBox 9"/>
-          <p:cNvSpPr txBox="1"/>
-          <p:nvPr/>
-        </p:nvSpPr>
-        <p:spPr>
-          <a:xfrm>
-            <a:off x="3200400" y="1847088"/>
-            <a:ext cx="8092440" cy="1600200"/>
-          </a:xfrm>
-          <a:prstGeom prst="rect">
-            <a:avLst/>
-          </a:prstGeom>
-          <a:noFill/>
-        </p:spPr>
-        <p:txBody>
-          <a:bodyPr wrap="square">
-            <a:spAutoFit/>
-          </a:bodyPr>
-          <a:lstStyle/>
-          <a:p>
-            <a:r>
-              <a:rPr sz="1800" b="0" i="0">
-                <a:solidFill>
-                  <a:srgbClr val="1A1A1A"/>
-                </a:solidFill>
-                <a:latin typeface="Arial"/>
-              </a:rPr>
-              <a:t>Updates slip during a busy quarter. The picture drifts from reality. Someone relies on it, gets burned, and word spreads that the repository cannot be trusted. Once trust goes, people stop using it.</a:t>
-            </a:r>
-          </a:p>
-        </p:txBody>
-      </p:sp>
-      <p:sp>
-        <p:nvSpPr>
-          <p:cNvPr id="11" name="Rounded Rectangle 10"/>
+          <p:cNvPr id="7" name="Rounded Rectangle 6"/>
           <p:cNvSpPr/>
           <p:nvPr/>
         </p:nvSpPr>
         <p:spPr>
           <a:xfrm>
-            <a:off x="658368" y="3931920"/>
-            <a:ext cx="10881360" cy="1920240"/>
+            <a:off x="10049256" y="1207008"/>
+            <a:ext cx="841248" cy="310896"/>
           </a:xfrm>
           <a:prstGeom prst="roundRect">
             <a:avLst>
-              <a:gd name="adj" fmla="val 4500"/>
+              <a:gd name="adj" fmla="val 35000"/>
             </a:avLst>
           </a:prstGeom>
           <a:solidFill>
-            <a:srgbClr val="009CD6"/>
+            <a:srgbClr val="E5F5FB"/>
           </a:solidFill>
           <a:ln>
             <a:noFill/>
@@ -13488,140 +13439,22 @@
       </p:sp>
       <p:sp>
         <p:nvSpPr>
-          <p:cNvPr id="12" name="TextBox 11"/>
-          <p:cNvSpPr txBox="1"/>
-          <p:nvPr/>
-        </p:nvSpPr>
-        <p:spPr>
-          <a:xfrm>
-            <a:off x="868680" y="4114800"/>
-            <a:ext cx="2286000" cy="365760"/>
-          </a:xfrm>
-          <a:prstGeom prst="rect">
-            <a:avLst/>
-          </a:prstGeom>
-          <a:noFill/>
-        </p:spPr>
-        <p:txBody>
-          <a:bodyPr wrap="square">
-            <a:spAutoFit/>
-          </a:bodyPr>
-          <a:lstStyle/>
-          <a:p>
-            <a:r>
-              <a:rPr sz="1100" b="1" i="0">
-                <a:solidFill>
-                  <a:srgbClr val="FFFFFF"/>
-                </a:solidFill>
-                <a:latin typeface="Arial"/>
-              </a:rPr>
-              <a:t>THE COUNTER</a:t>
-            </a:r>
-          </a:p>
-        </p:txBody>
-      </p:sp>
-      <p:sp>
-        <p:nvSpPr>
-          <p:cNvPr id="13" name="TextBox 12"/>
-          <p:cNvSpPr txBox="1"/>
-          <p:nvPr/>
-        </p:nvSpPr>
-        <p:spPr>
-          <a:xfrm>
-            <a:off x="3200400" y="4087368"/>
-            <a:ext cx="8092440" cy="1600200"/>
-          </a:xfrm>
-          <a:prstGeom prst="rect">
-            <a:avLst/>
-          </a:prstGeom>
-          <a:noFill/>
-        </p:spPr>
-        <p:txBody>
-          <a:bodyPr wrap="square">
-            <a:spAutoFit/>
-          </a:bodyPr>
-          <a:lstStyle/>
-          <a:p>
-            <a:r>
-              <a:rPr sz="1800" b="0" i="0">
-                <a:solidFill>
-                  <a:srgbClr val="FFFFFF"/>
-                </a:solidFill>
-                <a:latin typeface="Arial"/>
-              </a:rPr>
-              <a:t>The update discipline: one named owner accountable for currency, updates tied to real events and to the review gate — so the repository stays true as a by-product of work that happens anyway.</a:t>
-            </a:r>
-          </a:p>
-        </p:txBody>
-      </p:sp>
-      <p:sp>
-        <p:nvSpPr>
-          <p:cNvPr id="14" name="TextBox 13"/>
-          <p:cNvSpPr txBox="1"/>
-          <p:nvPr/>
-        </p:nvSpPr>
-        <p:spPr>
-          <a:xfrm>
-            <a:off x="457200" y="6473952"/>
-            <a:ext cx="7772400" cy="292608"/>
-          </a:xfrm>
-          <a:prstGeom prst="rect">
-            <a:avLst/>
-          </a:prstGeom>
-          <a:noFill/>
-        </p:spPr>
-        <p:txBody>
-          <a:bodyPr wrap="square">
-            <a:spAutoFit/>
-          </a:bodyPr>
-          <a:lstStyle/>
-          <a:p>
-            <a:r>
-              <a:rPr sz="900" b="0" i="0">
-                <a:solidFill>
-                  <a:srgbClr val="595959"/>
-                </a:solidFill>
-                <a:latin typeface="Arial"/>
-              </a:rPr>
-              <a:t>3.7 · Keep the practice alive past year two</a:t>
-            </a:r>
-          </a:p>
-        </p:txBody>
-      </p:sp>
-    </p:spTree>
-  </p:cSld>
-  <p:clrMapOvr>
-    <a:masterClrMapping/>
-  </p:clrMapOvr>
-</p:sld>
-</file>
-
-<file path=ppt/slides/slide51.xml><?xml version="1.0" encoding="utf-8"?>
-<p:sld xmlns:a="http://schemas.openxmlformats.org/drawingml/2006/main" xmlns:p="http://schemas.openxmlformats.org/presentationml/2006/main" xmlns:r="http://schemas.openxmlformats.org/officeDocument/2006/relationships">
-  <p:cSld>
-    <p:spTree>
-      <p:nvGrpSpPr>
-        <p:cNvPr id="1" name=""/>
-        <p:cNvGrpSpPr/>
-        <p:nvPr/>
-      </p:nvGrpSpPr>
-      <p:grpSpPr/>
-      <p:sp>
-        <p:nvSpPr>
-          <p:cNvPr id="2" name="Rectangle 1"/>
+          <p:cNvPr id="8" name="Rounded Rectangle 7"/>
           <p:cNvSpPr/>
           <p:nvPr/>
         </p:nvSpPr>
         <p:spPr>
           <a:xfrm>
-            <a:off x="457200" y="384048"/>
-            <a:ext cx="45720" cy="256032"/>
-          </a:xfrm>
-          <a:prstGeom prst="rect">
-            <a:avLst/>
+            <a:off x="658368" y="1691640"/>
+            <a:ext cx="10881360" cy="1920240"/>
+          </a:xfrm>
+          <a:prstGeom prst="roundRect">
+            <a:avLst>
+              <a:gd name="adj" fmla="val 4500"/>
+            </a:avLst>
           </a:prstGeom>
           <a:solidFill>
-            <a:srgbClr val="009CD6"/>
+            <a:srgbClr val="E5F5FB"/>
           </a:solidFill>
           <a:ln>
             <a:noFill/>
@@ -13652,14 +13485,14 @@
       </p:sp>
       <p:sp>
         <p:nvSpPr>
-          <p:cNvPr id="3" name="TextBox 2"/>
+          <p:cNvPr id="9" name="TextBox 8"/>
           <p:cNvSpPr txBox="1"/>
           <p:nvPr/>
         </p:nvSpPr>
         <p:spPr>
           <a:xfrm>
-            <a:off x="621792" y="274320"/>
-            <a:ext cx="11247120" cy="914400"/>
+            <a:off x="868680" y="1874520"/>
+            <a:ext cx="2286000" cy="365760"/>
           </a:xfrm>
           <a:prstGeom prst="rect">
             <a:avLst/>
@@ -13673,35 +13506,69 @@
           <a:lstStyle/>
           <a:p>
             <a:r>
-              <a:rPr sz="2800" b="1" i="0">
+              <a:rPr sz="1100" b="1" i="0">
+                <a:solidFill>
+                  <a:srgbClr val="006E96"/>
+                </a:solidFill>
+                <a:latin typeface="Arial"/>
+              </a:rPr>
+              <a:t>HOW IT FADES</a:t>
+            </a:r>
+          </a:p>
+        </p:txBody>
+      </p:sp>
+      <p:sp>
+        <p:nvSpPr>
+          <p:cNvPr id="10" name="TextBox 9"/>
+          <p:cNvSpPr txBox="1"/>
+          <p:nvPr/>
+        </p:nvSpPr>
+        <p:spPr>
+          <a:xfrm>
+            <a:off x="3200400" y="1847088"/>
+            <a:ext cx="8092440" cy="1600200"/>
+          </a:xfrm>
+          <a:prstGeom prst="rect">
+            <a:avLst/>
+          </a:prstGeom>
+          <a:noFill/>
+        </p:spPr>
+        <p:txBody>
+          <a:bodyPr wrap="square">
+            <a:spAutoFit/>
+          </a:bodyPr>
+          <a:lstStyle/>
+          <a:p>
+            <a:r>
+              <a:rPr sz="1800" b="0" i="0">
                 <a:solidFill>
                   <a:srgbClr val="1A1A1A"/>
                 </a:solidFill>
                 <a:latin typeface="Arial"/>
               </a:rPr>
-              <a:t>Fade three — a Board overruled in silence is a Board being dismantled</a:t>
-            </a:r>
-          </a:p>
-        </p:txBody>
-      </p:sp>
-      <p:sp>
-        <p:nvSpPr>
-          <p:cNvPr id="4" name="Rounded Rectangle 3"/>
+              <a:t>Under delivery pressure, a powerful project is let through despite the Board’s objection. Then another. The no becomes a suggestion, projects learn they can route around it, and within a year it is a discussion group again.</a:t>
+            </a:r>
+          </a:p>
+        </p:txBody>
+      </p:sp>
+      <p:sp>
+        <p:nvSpPr>
+          <p:cNvPr id="11" name="Rounded Rectangle 10"/>
           <p:cNvSpPr/>
           <p:nvPr/>
         </p:nvSpPr>
         <p:spPr>
           <a:xfrm>
-            <a:off x="7360920" y="1207008"/>
-            <a:ext cx="841248" cy="310896"/>
+            <a:off x="658368" y="3931920"/>
+            <a:ext cx="10881360" cy="1920240"/>
           </a:xfrm>
           <a:prstGeom prst="roundRect">
             <a:avLst>
-              <a:gd name="adj" fmla="val 35000"/>
+              <a:gd name="adj" fmla="val 4500"/>
             </a:avLst>
           </a:prstGeom>
           <a:solidFill>
-            <a:srgbClr val="E5F5FB"/>
+            <a:srgbClr val="009CD6"/>
           </a:solidFill>
           <a:ln>
             <a:noFill/>
@@ -13732,22 +13599,140 @@
       </p:sp>
       <p:sp>
         <p:nvSpPr>
-          <p:cNvPr id="5" name="Rounded Rectangle 4"/>
+          <p:cNvPr id="12" name="TextBox 11"/>
+          <p:cNvSpPr txBox="1"/>
+          <p:nvPr/>
+        </p:nvSpPr>
+        <p:spPr>
+          <a:xfrm>
+            <a:off x="868680" y="4114800"/>
+            <a:ext cx="2286000" cy="365760"/>
+          </a:xfrm>
+          <a:prstGeom prst="rect">
+            <a:avLst/>
+          </a:prstGeom>
+          <a:noFill/>
+        </p:spPr>
+        <p:txBody>
+          <a:bodyPr wrap="square">
+            <a:spAutoFit/>
+          </a:bodyPr>
+          <a:lstStyle/>
+          <a:p>
+            <a:r>
+              <a:rPr sz="1100" b="1" i="0">
+                <a:solidFill>
+                  <a:srgbClr val="FFFFFF"/>
+                </a:solidFill>
+                <a:latin typeface="Arial"/>
+              </a:rPr>
+              <a:t>THE COUNTER</a:t>
+            </a:r>
+          </a:p>
+        </p:txBody>
+      </p:sp>
+      <p:sp>
+        <p:nvSpPr>
+          <p:cNvPr id="13" name="TextBox 12"/>
+          <p:cNvSpPr txBox="1"/>
+          <p:nvPr/>
+        </p:nvSpPr>
+        <p:spPr>
+          <a:xfrm>
+            <a:off x="3200400" y="4087368"/>
+            <a:ext cx="8092440" cy="1600200"/>
+          </a:xfrm>
+          <a:prstGeom prst="rect">
+            <a:avLst/>
+          </a:prstGeom>
+          <a:noFill/>
+        </p:spPr>
+        <p:txBody>
+          <a:bodyPr wrap="square">
+            <a:spAutoFit/>
+          </a:bodyPr>
+          <a:lstStyle/>
+          <a:p>
+            <a:r>
+              <a:rPr sz="1800" b="0" i="0">
+                <a:solidFill>
+                  <a:srgbClr val="FFFFFF"/>
+                </a:solidFill>
+                <a:latin typeface="Arial"/>
+              </a:rPr>
+              <a:t>Protect the binding authority deliberately — and track and report every time the Board is overruled. Sunlight on overrides is what keeps the authority real.</a:t>
+            </a:r>
+          </a:p>
+        </p:txBody>
+      </p:sp>
+      <p:sp>
+        <p:nvSpPr>
+          <p:cNvPr id="14" name="TextBox 13"/>
+          <p:cNvSpPr txBox="1"/>
+          <p:nvPr/>
+        </p:nvSpPr>
+        <p:spPr>
+          <a:xfrm>
+            <a:off x="457200" y="6473952"/>
+            <a:ext cx="7772400" cy="292608"/>
+          </a:xfrm>
+          <a:prstGeom prst="rect">
+            <a:avLst/>
+          </a:prstGeom>
+          <a:noFill/>
+        </p:spPr>
+        <p:txBody>
+          <a:bodyPr wrap="square">
+            <a:spAutoFit/>
+          </a:bodyPr>
+          <a:lstStyle/>
+          <a:p>
+            <a:r>
+              <a:rPr sz="900" b="0" i="0">
+                <a:solidFill>
+                  <a:srgbClr val="595959"/>
+                </a:solidFill>
+                <a:latin typeface="Arial"/>
+              </a:rPr>
+              <a:t>3.7 · Keep the practice alive past year two</a:t>
+            </a:r>
+          </a:p>
+        </p:txBody>
+      </p:sp>
+    </p:spTree>
+  </p:cSld>
+  <p:clrMapOvr>
+    <a:masterClrMapping/>
+  </p:clrMapOvr>
+</p:sld>
+</file>
+
+<file path=ppt/slides/slide59.xml><?xml version="1.0" encoding="utf-8"?>
+<p:sld xmlns:a="http://schemas.openxmlformats.org/drawingml/2006/main" xmlns:p="http://schemas.openxmlformats.org/presentationml/2006/main" xmlns:r="http://schemas.openxmlformats.org/officeDocument/2006/relationships">
+  <p:cSld>
+    <p:spTree>
+      <p:nvGrpSpPr>
+        <p:cNvPr id="1" name=""/>
+        <p:cNvGrpSpPr/>
+        <p:nvPr/>
+      </p:nvGrpSpPr>
+      <p:grpSpPr/>
+      <p:sp>
+        <p:nvSpPr>
+          <p:cNvPr id="2" name="Rectangle 1"/>
           <p:cNvSpPr/>
           <p:nvPr/>
         </p:nvSpPr>
         <p:spPr>
           <a:xfrm>
-            <a:off x="8257032" y="1207008"/>
-            <a:ext cx="841248" cy="310896"/>
-          </a:xfrm>
-          <a:prstGeom prst="roundRect">
-            <a:avLst>
-              <a:gd name="adj" fmla="val 35000"/>
-            </a:avLst>
+            <a:off x="457200" y="384048"/>
+            <a:ext cx="45720" cy="256032"/>
+          </a:xfrm>
+          <a:prstGeom prst="rect">
+            <a:avLst/>
           </a:prstGeom>
           <a:solidFill>
-            <a:srgbClr val="E5F5FB"/>
+            <a:srgbClr val="009CD6"/>
           </a:solidFill>
           <a:ln>
             <a:noFill/>
@@ -13778,13 +13763,47 @@
       </p:sp>
       <p:sp>
         <p:nvSpPr>
-          <p:cNvPr id="6" name="Rounded Rectangle 5"/>
+          <p:cNvPr id="3" name="TextBox 2"/>
+          <p:cNvSpPr txBox="1"/>
+          <p:nvPr/>
+        </p:nvSpPr>
+        <p:spPr>
+          <a:xfrm>
+            <a:off x="621792" y="274320"/>
+            <a:ext cx="11247120" cy="914400"/>
+          </a:xfrm>
+          <a:prstGeom prst="rect">
+            <a:avLst/>
+          </a:prstGeom>
+          <a:noFill/>
+        </p:spPr>
+        <p:txBody>
+          <a:bodyPr wrap="square">
+            <a:spAutoFit/>
+          </a:bodyPr>
+          <a:lstStyle/>
+          <a:p>
+            <a:r>
+              <a:rPr sz="2800" b="1" i="0">
+                <a:solidFill>
+                  <a:srgbClr val="1A1A1A"/>
+                </a:solidFill>
+                <a:latin typeface="Arial"/>
+              </a:rPr>
+              <a:t>Fade four — an EA that depends on one champion dies with that champion</a:t>
+            </a:r>
+          </a:p>
+        </p:txBody>
+      </p:sp>
+      <p:sp>
+        <p:nvSpPr>
+          <p:cNvPr id="4" name="Rounded Rectangle 3"/>
           <p:cNvSpPr/>
           <p:nvPr/>
         </p:nvSpPr>
         <p:spPr>
           <a:xfrm>
-            <a:off x="9153144" y="1207008"/>
+            <a:off x="7360920" y="1207008"/>
             <a:ext cx="841248" cy="310896"/>
           </a:xfrm>
           <a:prstGeom prst="roundRect">
@@ -13793,7 +13812,7 @@
             </a:avLst>
           </a:prstGeom>
           <a:solidFill>
-            <a:srgbClr val="009CD6"/>
+            <a:srgbClr val="E5F5FB"/>
           </a:solidFill>
           <a:ln>
             <a:noFill/>
@@ -13824,13 +13843,13 @@
       </p:sp>
       <p:sp>
         <p:nvSpPr>
-          <p:cNvPr id="7" name="Rounded Rectangle 6"/>
+          <p:cNvPr id="5" name="Rounded Rectangle 4"/>
           <p:cNvSpPr/>
           <p:nvPr/>
         </p:nvSpPr>
         <p:spPr>
           <a:xfrm>
-            <a:off x="10049256" y="1207008"/>
+            <a:off x="8257032" y="1207008"/>
             <a:ext cx="841248" cy="310896"/>
           </a:xfrm>
           <a:prstGeom prst="roundRect">
@@ -13870,18 +13889,18 @@
       </p:sp>
       <p:sp>
         <p:nvSpPr>
-          <p:cNvPr id="8" name="Rounded Rectangle 7"/>
+          <p:cNvPr id="6" name="Rounded Rectangle 5"/>
           <p:cNvSpPr/>
           <p:nvPr/>
         </p:nvSpPr>
         <p:spPr>
           <a:xfrm>
-            <a:off x="658368" y="1691640"/>
-            <a:ext cx="10881360" cy="1920240"/>
+            <a:off x="9153144" y="1207008"/>
+            <a:ext cx="841248" cy="310896"/>
           </a:xfrm>
           <a:prstGeom prst="roundRect">
             <a:avLst>
-              <a:gd name="adj" fmla="val 4500"/>
+              <a:gd name="adj" fmla="val 35000"/>
             </a:avLst>
           </a:prstGeom>
           <a:solidFill>
@@ -13916,86 +13935,18 @@
       </p:sp>
       <p:sp>
         <p:nvSpPr>
-          <p:cNvPr id="9" name="TextBox 8"/>
-          <p:cNvSpPr txBox="1"/>
-          <p:nvPr/>
-        </p:nvSpPr>
-        <p:spPr>
-          <a:xfrm>
-            <a:off x="868680" y="1874520"/>
-            <a:ext cx="2286000" cy="365760"/>
-          </a:xfrm>
-          <a:prstGeom prst="rect">
-            <a:avLst/>
-          </a:prstGeom>
-          <a:noFill/>
-        </p:spPr>
-        <p:txBody>
-          <a:bodyPr wrap="square">
-            <a:spAutoFit/>
-          </a:bodyPr>
-          <a:lstStyle/>
-          <a:p>
-            <a:r>
-              <a:rPr sz="1100" b="1" i="0">
-                <a:solidFill>
-                  <a:srgbClr val="006E96"/>
-                </a:solidFill>
-                <a:latin typeface="Arial"/>
-              </a:rPr>
-              <a:t>HOW IT FADES</a:t>
-            </a:r>
-          </a:p>
-        </p:txBody>
-      </p:sp>
-      <p:sp>
-        <p:nvSpPr>
-          <p:cNvPr id="10" name="TextBox 9"/>
-          <p:cNvSpPr txBox="1"/>
-          <p:nvPr/>
-        </p:nvSpPr>
-        <p:spPr>
-          <a:xfrm>
-            <a:off x="3200400" y="1847088"/>
-            <a:ext cx="8092440" cy="1600200"/>
-          </a:xfrm>
-          <a:prstGeom prst="rect">
-            <a:avLst/>
-          </a:prstGeom>
-          <a:noFill/>
-        </p:spPr>
-        <p:txBody>
-          <a:bodyPr wrap="square">
-            <a:spAutoFit/>
-          </a:bodyPr>
-          <a:lstStyle/>
-          <a:p>
-            <a:r>
-              <a:rPr sz="1800" b="0" i="0">
-                <a:solidFill>
-                  <a:srgbClr val="1A1A1A"/>
-                </a:solidFill>
-                <a:latin typeface="Arial"/>
-              </a:rPr>
-              <a:t>Under delivery pressure, a powerful project is let through despite the Board’s objection. Then another. The no becomes a suggestion, projects learn they can route around it, and within a year it is a discussion group again.</a:t>
-            </a:r>
-          </a:p>
-        </p:txBody>
-      </p:sp>
-      <p:sp>
-        <p:nvSpPr>
-          <p:cNvPr id="11" name="Rounded Rectangle 10"/>
+          <p:cNvPr id="7" name="Rounded Rectangle 6"/>
           <p:cNvSpPr/>
           <p:nvPr/>
         </p:nvSpPr>
         <p:spPr>
           <a:xfrm>
-            <a:off x="658368" y="3931920"/>
-            <a:ext cx="10881360" cy="1920240"/>
+            <a:off x="10049256" y="1207008"/>
+            <a:ext cx="841248" cy="310896"/>
           </a:xfrm>
           <a:prstGeom prst="roundRect">
             <a:avLst>
-              <a:gd name="adj" fmla="val 4500"/>
+              <a:gd name="adj" fmla="val 35000"/>
             </a:avLst>
           </a:prstGeom>
           <a:solidFill>
@@ -14030,140 +13981,22 @@
       </p:sp>
       <p:sp>
         <p:nvSpPr>
-          <p:cNvPr id="12" name="TextBox 11"/>
-          <p:cNvSpPr txBox="1"/>
-          <p:nvPr/>
-        </p:nvSpPr>
-        <p:spPr>
-          <a:xfrm>
-            <a:off x="868680" y="4114800"/>
-            <a:ext cx="2286000" cy="365760"/>
-          </a:xfrm>
-          <a:prstGeom prst="rect">
-            <a:avLst/>
-          </a:prstGeom>
-          <a:noFill/>
-        </p:spPr>
-        <p:txBody>
-          <a:bodyPr wrap="square">
-            <a:spAutoFit/>
-          </a:bodyPr>
-          <a:lstStyle/>
-          <a:p>
-            <a:r>
-              <a:rPr sz="1100" b="1" i="0">
-                <a:solidFill>
-                  <a:srgbClr val="FFFFFF"/>
-                </a:solidFill>
-                <a:latin typeface="Arial"/>
-              </a:rPr>
-              <a:t>THE COUNTER</a:t>
-            </a:r>
-          </a:p>
-        </p:txBody>
-      </p:sp>
-      <p:sp>
-        <p:nvSpPr>
-          <p:cNvPr id="13" name="TextBox 12"/>
-          <p:cNvSpPr txBox="1"/>
-          <p:nvPr/>
-        </p:nvSpPr>
-        <p:spPr>
-          <a:xfrm>
-            <a:off x="3200400" y="4087368"/>
-            <a:ext cx="8092440" cy="1600200"/>
-          </a:xfrm>
-          <a:prstGeom prst="rect">
-            <a:avLst/>
-          </a:prstGeom>
-          <a:noFill/>
-        </p:spPr>
-        <p:txBody>
-          <a:bodyPr wrap="square">
-            <a:spAutoFit/>
-          </a:bodyPr>
-          <a:lstStyle/>
-          <a:p>
-            <a:r>
-              <a:rPr sz="1800" b="0" i="0">
-                <a:solidFill>
-                  <a:srgbClr val="FFFFFF"/>
-                </a:solidFill>
-                <a:latin typeface="Arial"/>
-              </a:rPr>
-              <a:t>Protect the binding authority deliberately — and track and report every time the Board is overruled. Sunlight on overrides is what keeps the authority real.</a:t>
-            </a:r>
-          </a:p>
-        </p:txBody>
-      </p:sp>
-      <p:sp>
-        <p:nvSpPr>
-          <p:cNvPr id="14" name="TextBox 13"/>
-          <p:cNvSpPr txBox="1"/>
-          <p:nvPr/>
-        </p:nvSpPr>
-        <p:spPr>
-          <a:xfrm>
-            <a:off x="457200" y="6473952"/>
-            <a:ext cx="7772400" cy="292608"/>
-          </a:xfrm>
-          <a:prstGeom prst="rect">
-            <a:avLst/>
-          </a:prstGeom>
-          <a:noFill/>
-        </p:spPr>
-        <p:txBody>
-          <a:bodyPr wrap="square">
-            <a:spAutoFit/>
-          </a:bodyPr>
-          <a:lstStyle/>
-          <a:p>
-            <a:r>
-              <a:rPr sz="900" b="0" i="0">
-                <a:solidFill>
-                  <a:srgbClr val="595959"/>
-                </a:solidFill>
-                <a:latin typeface="Arial"/>
-              </a:rPr>
-              <a:t>3.7 · Keep the practice alive past year two</a:t>
-            </a:r>
-          </a:p>
-        </p:txBody>
-      </p:sp>
-    </p:spTree>
-  </p:cSld>
-  <p:clrMapOvr>
-    <a:masterClrMapping/>
-  </p:clrMapOvr>
-</p:sld>
-</file>
-
-<file path=ppt/slides/slide52.xml><?xml version="1.0" encoding="utf-8"?>
-<p:sld xmlns:a="http://schemas.openxmlformats.org/drawingml/2006/main" xmlns:p="http://schemas.openxmlformats.org/presentationml/2006/main" xmlns:r="http://schemas.openxmlformats.org/officeDocument/2006/relationships">
-  <p:cSld>
-    <p:spTree>
-      <p:nvGrpSpPr>
-        <p:cNvPr id="1" name=""/>
-        <p:cNvGrpSpPr/>
-        <p:nvPr/>
-      </p:nvGrpSpPr>
-      <p:grpSpPr/>
-      <p:sp>
-        <p:nvSpPr>
-          <p:cNvPr id="2" name="Rectangle 1"/>
+          <p:cNvPr id="8" name="Rounded Rectangle 7"/>
           <p:cNvSpPr/>
           <p:nvPr/>
         </p:nvSpPr>
         <p:spPr>
           <a:xfrm>
-            <a:off x="457200" y="384048"/>
-            <a:ext cx="45720" cy="256032"/>
-          </a:xfrm>
-          <a:prstGeom prst="rect">
-            <a:avLst/>
+            <a:off x="658368" y="1691640"/>
+            <a:ext cx="10881360" cy="1920240"/>
+          </a:xfrm>
+          <a:prstGeom prst="roundRect">
+            <a:avLst>
+              <a:gd name="adj" fmla="val 4500"/>
+            </a:avLst>
           </a:prstGeom>
           <a:solidFill>
-            <a:srgbClr val="009CD6"/>
+            <a:srgbClr val="E5F5FB"/>
           </a:solidFill>
           <a:ln>
             <a:noFill/>
@@ -14194,14 +14027,14 @@
       </p:sp>
       <p:sp>
         <p:nvSpPr>
-          <p:cNvPr id="3" name="TextBox 2"/>
+          <p:cNvPr id="9" name="TextBox 8"/>
           <p:cNvSpPr txBox="1"/>
           <p:nvPr/>
         </p:nvSpPr>
         <p:spPr>
           <a:xfrm>
-            <a:off x="621792" y="274320"/>
-            <a:ext cx="11247120" cy="914400"/>
+            <a:off x="868680" y="1874520"/>
+            <a:ext cx="2286000" cy="365760"/>
           </a:xfrm>
           <a:prstGeom prst="rect">
             <a:avLst/>
@@ -14215,35 +14048,69 @@
           <a:lstStyle/>
           <a:p>
             <a:r>
-              <a:rPr sz="2800" b="1" i="0">
+              <a:rPr sz="1100" b="1" i="0">
+                <a:solidFill>
+                  <a:srgbClr val="006E96"/>
+                </a:solidFill>
+                <a:latin typeface="Arial"/>
+              </a:rPr>
+              <a:t>HOW IT FADES</a:t>
+            </a:r>
+          </a:p>
+        </p:txBody>
+      </p:sp>
+      <p:sp>
+        <p:nvSpPr>
+          <p:cNvPr id="10" name="TextBox 9"/>
+          <p:cNvSpPr txBox="1"/>
+          <p:nvPr/>
+        </p:nvSpPr>
+        <p:spPr>
+          <a:xfrm>
+            <a:off x="3200400" y="1847088"/>
+            <a:ext cx="8092440" cy="1600200"/>
+          </a:xfrm>
+          <a:prstGeom prst="rect">
+            <a:avLst/>
+          </a:prstGeom>
+          <a:noFill/>
+        </p:spPr>
+        <p:txBody>
+          <a:bodyPr wrap="square">
+            <a:spAutoFit/>
+          </a:bodyPr>
+          <a:lstStyle/>
+          <a:p>
+            <a:r>
+              <a:rPr sz="1800" b="0" i="0">
                 <a:solidFill>
                   <a:srgbClr val="1A1A1A"/>
                 </a:solidFill>
                 <a:latin typeface="Arial"/>
               </a:rPr>
-              <a:t>Fade four — an EA that depends on one champion dies with that champion</a:t>
-            </a:r>
-          </a:p>
-        </p:txBody>
-      </p:sp>
-      <p:sp>
-        <p:nvSpPr>
-          <p:cNvPr id="4" name="Rounded Rectangle 3"/>
+              <a:t>The minister or the digitalisation officer who championed the EA moves on. The successor has their own priorities and no attachment to this one.</a:t>
+            </a:r>
+          </a:p>
+        </p:txBody>
+      </p:sp>
+      <p:sp>
+        <p:nvSpPr>
+          <p:cNvPr id="11" name="Rounded Rectangle 10"/>
           <p:cNvSpPr/>
           <p:nvPr/>
         </p:nvSpPr>
         <p:spPr>
           <a:xfrm>
-            <a:off x="7360920" y="1207008"/>
-            <a:ext cx="841248" cy="310896"/>
+            <a:off x="658368" y="3931920"/>
+            <a:ext cx="10881360" cy="1920240"/>
           </a:xfrm>
           <a:prstGeom prst="roundRect">
             <a:avLst>
-              <a:gd name="adj" fmla="val 35000"/>
+              <a:gd name="adj" fmla="val 4500"/>
             </a:avLst>
           </a:prstGeom>
           <a:solidFill>
-            <a:srgbClr val="E5F5FB"/>
+            <a:srgbClr val="009CD6"/>
           </a:solidFill>
           <a:ln>
             <a:noFill/>
@@ -14274,22 +14141,140 @@
       </p:sp>
       <p:sp>
         <p:nvSpPr>
-          <p:cNvPr id="5" name="Rounded Rectangle 4"/>
+          <p:cNvPr id="12" name="TextBox 11"/>
+          <p:cNvSpPr txBox="1"/>
+          <p:nvPr/>
+        </p:nvSpPr>
+        <p:spPr>
+          <a:xfrm>
+            <a:off x="868680" y="4114800"/>
+            <a:ext cx="2286000" cy="365760"/>
+          </a:xfrm>
+          <a:prstGeom prst="rect">
+            <a:avLst/>
+          </a:prstGeom>
+          <a:noFill/>
+        </p:spPr>
+        <p:txBody>
+          <a:bodyPr wrap="square">
+            <a:spAutoFit/>
+          </a:bodyPr>
+          <a:lstStyle/>
+          <a:p>
+            <a:r>
+              <a:rPr sz="1100" b="1" i="0">
+                <a:solidFill>
+                  <a:srgbClr val="FFFFFF"/>
+                </a:solidFill>
+                <a:latin typeface="Arial"/>
+              </a:rPr>
+              <a:t>THE COUNTER</a:t>
+            </a:r>
+          </a:p>
+        </p:txBody>
+      </p:sp>
+      <p:sp>
+        <p:nvSpPr>
+          <p:cNvPr id="13" name="TextBox 12"/>
+          <p:cNvSpPr txBox="1"/>
+          <p:nvPr/>
+        </p:nvSpPr>
+        <p:spPr>
+          <a:xfrm>
+            <a:off x="3200400" y="4087368"/>
+            <a:ext cx="8092440" cy="1600200"/>
+          </a:xfrm>
+          <a:prstGeom prst="rect">
+            <a:avLst/>
+          </a:prstGeom>
+          <a:noFill/>
+        </p:spPr>
+        <p:txBody>
+          <a:bodyPr wrap="square">
+            <a:spAutoFit/>
+          </a:bodyPr>
+          <a:lstStyle/>
+          <a:p>
+            <a:r>
+              <a:rPr sz="1800" b="0" i="0">
+                <a:solidFill>
+                  <a:srgbClr val="FFFFFF"/>
+                </a:solidFill>
+                <a:latin typeface="Arial"/>
+              </a:rPr>
+              <a:t>Institutionalise it: a legal mandate for the Board, not just a memo. A budget line, not an annual favour. And the one-page scorecard, so a new sponsor can see in five minutes that the EA is returning its cost.</a:t>
+            </a:r>
+          </a:p>
+        </p:txBody>
+      </p:sp>
+      <p:sp>
+        <p:nvSpPr>
+          <p:cNvPr id="14" name="TextBox 13"/>
+          <p:cNvSpPr txBox="1"/>
+          <p:nvPr/>
+        </p:nvSpPr>
+        <p:spPr>
+          <a:xfrm>
+            <a:off x="457200" y="6473952"/>
+            <a:ext cx="7772400" cy="292608"/>
+          </a:xfrm>
+          <a:prstGeom prst="rect">
+            <a:avLst/>
+          </a:prstGeom>
+          <a:noFill/>
+        </p:spPr>
+        <p:txBody>
+          <a:bodyPr wrap="square">
+            <a:spAutoFit/>
+          </a:bodyPr>
+          <a:lstStyle/>
+          <a:p>
+            <a:r>
+              <a:rPr sz="900" b="0" i="0">
+                <a:solidFill>
+                  <a:srgbClr val="595959"/>
+                </a:solidFill>
+                <a:latin typeface="Arial"/>
+              </a:rPr>
+              <a:t>3.7 · Keep the practice alive past year two</a:t>
+            </a:r>
+          </a:p>
+        </p:txBody>
+      </p:sp>
+    </p:spTree>
+  </p:cSld>
+  <p:clrMapOvr>
+    <a:masterClrMapping/>
+  </p:clrMapOvr>
+</p:sld>
+</file>
+
+<file path=ppt/slides/slide60.xml><?xml version="1.0" encoding="utf-8"?>
+<p:sld xmlns:a="http://schemas.openxmlformats.org/drawingml/2006/main" xmlns:p="http://schemas.openxmlformats.org/presentationml/2006/main" xmlns:r="http://schemas.openxmlformats.org/officeDocument/2006/relationships">
+  <p:cSld>
+    <p:spTree>
+      <p:nvGrpSpPr>
+        <p:cNvPr id="1" name=""/>
+        <p:cNvGrpSpPr/>
+        <p:nvPr/>
+      </p:nvGrpSpPr>
+      <p:grpSpPr/>
+      <p:sp>
+        <p:nvSpPr>
+          <p:cNvPr id="2" name="Rectangle 1"/>
           <p:cNvSpPr/>
           <p:nvPr/>
         </p:nvSpPr>
         <p:spPr>
           <a:xfrm>
-            <a:off x="8257032" y="1207008"/>
-            <a:ext cx="841248" cy="310896"/>
-          </a:xfrm>
-          <a:prstGeom prst="roundRect">
-            <a:avLst>
-              <a:gd name="adj" fmla="val 35000"/>
-            </a:avLst>
+            <a:off x="457200" y="384048"/>
+            <a:ext cx="45720" cy="256032"/>
+          </a:xfrm>
+          <a:prstGeom prst="rect">
+            <a:avLst/>
           </a:prstGeom>
           <a:solidFill>
-            <a:srgbClr val="E5F5FB"/>
+            <a:srgbClr val="009CD6"/>
           </a:solidFill>
           <a:ln>
             <a:noFill/>
@@ -14320,18 +14305,107 @@
       </p:sp>
       <p:sp>
         <p:nvSpPr>
-          <p:cNvPr id="6" name="Rounded Rectangle 5"/>
+          <p:cNvPr id="3" name="TextBox 2"/>
+          <p:cNvSpPr txBox="1"/>
+          <p:nvPr/>
+        </p:nvSpPr>
+        <p:spPr>
+          <a:xfrm>
+            <a:off x="621792" y="274320"/>
+            <a:ext cx="11247120" cy="914400"/>
+          </a:xfrm>
+          <a:prstGeom prst="rect">
+            <a:avLst/>
+          </a:prstGeom>
+          <a:noFill/>
+        </p:spPr>
+        <p:txBody>
+          <a:bodyPr wrap="square">
+            <a:spAutoFit/>
+          </a:bodyPr>
+          <a:lstStyle/>
+          <a:p>
+            <a:r>
+              <a:rPr sz="2800" b="1" i="0">
+                <a:solidFill>
+                  <a:srgbClr val="1A1A1A"/>
+                </a:solidFill>
+                <a:latin typeface="Arial"/>
+              </a:rPr>
+              <a:t>You are building something designed to outlast you</a:t>
+            </a:r>
+          </a:p>
+        </p:txBody>
+      </p:sp>
+      <p:sp>
+        <p:nvSpPr>
+          <p:cNvPr id="4" name="TextBox 3"/>
+          <p:cNvSpPr txBox="1"/>
+          <p:nvPr/>
+        </p:nvSpPr>
+        <p:spPr>
+          <a:xfrm>
+            <a:off x="658368" y="1600200"/>
+            <a:ext cx="10881360" cy="2651760"/>
+          </a:xfrm>
+          <a:prstGeom prst="rect">
+            <a:avLst/>
+          </a:prstGeom>
+          <a:noFill/>
+        </p:spPr>
+        <p:txBody>
+          <a:bodyPr wrap="square">
+            <a:spAutoFit/>
+          </a:bodyPr>
+          <a:lstStyle/>
+          <a:p>
+            <a:pPr>
+              <a:spcAft>
+                <a:spcPts val="1200"/>
+              </a:spcAft>
+            </a:pPr>
+            <a:r>
+              <a:rPr sz="2000" b="0" i="0">
+                <a:solidFill>
+                  <a:srgbClr val="1A1A1A"/>
+                </a:solidFill>
+                <a:latin typeface="Arial"/>
+              </a:rPr>
+              <a:t>A mature EA practice takes about five years. The architect who stands it up is rarely the one who sees it mature. That is not a reason for discouragement — it is the job.</a:t>
+            </a:r>
+          </a:p>
+          <a:p>
+            <a:pPr>
+              <a:spcAft>
+                <a:spcPts val="1200"/>
+              </a:spcAft>
+            </a:pPr>
+            <a:r>
+              <a:rPr sz="2000" b="0" i="0">
+                <a:solidFill>
+                  <a:srgbClr val="1A1A1A"/>
+                </a:solidFill>
+                <a:latin typeface="Arial"/>
+              </a:rPr>
+              <a:t>A repository that stays true without you. A Board that holds without you. A mandate that survives the next election.</a:t>
+            </a:r>
+          </a:p>
+        </p:txBody>
+      </p:sp>
+      <p:sp>
+        <p:nvSpPr>
+          <p:cNvPr id="5" name="Rounded Rectangle 4"/>
           <p:cNvSpPr/>
           <p:nvPr/>
         </p:nvSpPr>
         <p:spPr>
           <a:xfrm>
-            <a:off x="9153144" y="1207008"/>
-            <a:ext cx="841248" cy="310896"/>
+            <a:off x="658368" y="4434840"/>
+            <a:ext cx="10881360" cy="1325880"/>
           </a:xfrm>
           <a:prstGeom prst="roundRect">
             <a:avLst>
-              <a:gd name="adj" fmla="val 35000"/>
+              <a:gd name="adj" fmla="val 4500"/>
             </a:avLst>
           </a:prstGeom>
           <a:solidFill>
@@ -14366,25 +14440,186 @@
       </p:sp>
       <p:sp>
         <p:nvSpPr>
-          <p:cNvPr id="7" name="Rounded Rectangle 6"/>
+          <p:cNvPr id="6" name="TextBox 5"/>
+          <p:cNvSpPr txBox="1"/>
+          <p:nvPr/>
+        </p:nvSpPr>
+        <p:spPr>
+          <a:xfrm>
+            <a:off x="859536" y="4626864"/>
+            <a:ext cx="10479024" cy="1051560"/>
+          </a:xfrm>
+          <a:prstGeom prst="rect">
+            <a:avLst/>
+          </a:prstGeom>
+          <a:noFill/>
+        </p:spPr>
+        <p:txBody>
+          <a:bodyPr wrap="square">
+            <a:spAutoFit/>
+          </a:bodyPr>
+          <a:lstStyle/>
+          <a:p>
+            <a:pPr>
+              <a:spcAft>
+                <a:spcPts val="700"/>
+              </a:spcAft>
+            </a:pPr>
+            <a:r>
+              <a:rPr sz="2300" b="1" i="0">
+                <a:solidFill>
+                  <a:srgbClr val="006E96"/>
+                </a:solidFill>
+                <a:latin typeface="Arial"/>
+              </a:rPr>
+              <a:t>Build it to survive you, and you have done the work.</a:t>
+            </a:r>
+          </a:p>
+        </p:txBody>
+      </p:sp>
+      <p:sp>
+        <p:nvSpPr>
+          <p:cNvPr id="7" name="TextBox 6"/>
+          <p:cNvSpPr txBox="1"/>
+          <p:nvPr/>
+        </p:nvSpPr>
+        <p:spPr>
+          <a:xfrm>
+            <a:off x="457200" y="6473952"/>
+            <a:ext cx="7772400" cy="292608"/>
+          </a:xfrm>
+          <a:prstGeom prst="rect">
+            <a:avLst/>
+          </a:prstGeom>
+          <a:noFill/>
+        </p:spPr>
+        <p:txBody>
+          <a:bodyPr wrap="square">
+            <a:spAutoFit/>
+          </a:bodyPr>
+          <a:lstStyle/>
+          <a:p>
+            <a:r>
+              <a:rPr sz="900" b="0" i="0">
+                <a:solidFill>
+                  <a:srgbClr val="595959"/>
+                </a:solidFill>
+                <a:latin typeface="Arial"/>
+              </a:rPr>
+              <a:t>3.7 · Keep the practice alive past year two</a:t>
+            </a:r>
+          </a:p>
+        </p:txBody>
+      </p:sp>
+    </p:spTree>
+  </p:cSld>
+  <p:clrMapOvr>
+    <a:masterClrMapping/>
+  </p:clrMapOvr>
+</p:sld>
+</file>
+
+<file path=ppt/slides/slide61.xml><?xml version="1.0" encoding="utf-8"?>
+<p:sld xmlns:a="http://schemas.openxmlformats.org/drawingml/2006/main" xmlns:p="http://schemas.openxmlformats.org/presentationml/2006/main" xmlns:r="http://schemas.openxmlformats.org/officeDocument/2006/relationships">
+  <p:cSld>
+    <p:spTree>
+      <p:nvGrpSpPr>
+        <p:cNvPr id="1" name=""/>
+        <p:cNvGrpSpPr/>
+        <p:nvPr/>
+      </p:nvGrpSpPr>
+      <p:grpSpPr/>
+      <p:sp>
+        <p:nvSpPr>
+          <p:cNvPr id="2" name="TextBox 1"/>
+          <p:cNvSpPr txBox="1"/>
+          <p:nvPr/>
+        </p:nvSpPr>
+        <p:spPr>
+          <a:xfrm>
+            <a:off x="1005840" y="2103120"/>
+            <a:ext cx="10149840" cy="2377440"/>
+          </a:xfrm>
+          <a:prstGeom prst="rect">
+            <a:avLst/>
+          </a:prstGeom>
+          <a:noFill/>
+        </p:spPr>
+        <p:txBody>
+          <a:bodyPr wrap="square">
+            <a:spAutoFit/>
+          </a:bodyPr>
+          <a:lstStyle/>
+          <a:p>
+            <a:r>
+              <a:rPr sz="3000" b="1" i="0">
+                <a:solidFill>
+                  <a:srgbClr val="1A1A1A"/>
+                </a:solidFill>
+                <a:latin typeface="Arial"/>
+              </a:rPr>
+              <a:t>EA programmes fade in four ways — team pulled, repository stale, Board gone advisory, sponsor changed — and you counter each by institutionalising the practice so it survives you.</a:t>
+            </a:r>
+          </a:p>
+        </p:txBody>
+      </p:sp>
+      <p:sp>
+        <p:nvSpPr>
+          <p:cNvPr id="3" name="TextBox 2"/>
+          <p:cNvSpPr txBox="1"/>
+          <p:nvPr/>
+        </p:nvSpPr>
+        <p:spPr>
+          <a:xfrm>
+            <a:off x="1005840" y="1554480"/>
+            <a:ext cx="5486400" cy="365760"/>
+          </a:xfrm>
+          <a:prstGeom prst="rect">
+            <a:avLst/>
+          </a:prstGeom>
+          <a:noFill/>
+        </p:spPr>
+        <p:txBody>
+          <a:bodyPr wrap="square">
+            <a:spAutoFit/>
+          </a:bodyPr>
+          <a:lstStyle/>
+          <a:p>
+            <a:r>
+              <a:rPr sz="1200" b="1" i="0">
+                <a:solidFill>
+                  <a:srgbClr val="006E96"/>
+                </a:solidFill>
+                <a:latin typeface="Arial"/>
+              </a:rPr>
+              <a:t>IN ONE SENTENCE</a:t>
+            </a:r>
+          </a:p>
+        </p:txBody>
+      </p:sp>
+      <p:sp>
+        <p:nvSpPr>
+          <p:cNvPr id="4" name="Rounded Rectangle 3"/>
           <p:cNvSpPr/>
           <p:nvPr/>
         </p:nvSpPr>
         <p:spPr>
           <a:xfrm>
-            <a:off x="10049256" y="1207008"/>
-            <a:ext cx="841248" cy="310896"/>
+            <a:off x="658368" y="4709160"/>
+            <a:ext cx="10881360" cy="1554480"/>
           </a:xfrm>
           <a:prstGeom prst="roundRect">
             <a:avLst>
-              <a:gd name="adj" fmla="val 35000"/>
+              <a:gd name="adj" fmla="val 4500"/>
             </a:avLst>
           </a:prstGeom>
           <a:solidFill>
-            <a:srgbClr val="009CD6"/>
+            <a:srgbClr val="FFFFFF"/>
           </a:solidFill>
-          <a:ln>
-            <a:noFill/>
+          <a:ln w="9525">
+            <a:solidFill>
+              <a:srgbClr val="009CD6"/>
+            </a:solidFill>
           </a:ln>
           <a:effectLst/>
         </p:spPr>
@@ -14403,244 +14638,56 @@
           </a:fontRef>
         </p:style>
         <p:txBody>
-          <a:bodyPr rtlCol="0" anchor="ctr"/>
-          <a:lstStyle/>
-          <a:p>
-            <a:pPr algn="ctr"/>
-          </a:p>
-        </p:txBody>
-      </p:sp>
-      <p:sp>
-        <p:nvSpPr>
-          <p:cNvPr id="8" name="Rounded Rectangle 7"/>
-          <p:cNvSpPr/>
-          <p:nvPr/>
-        </p:nvSpPr>
-        <p:spPr>
-          <a:xfrm>
-            <a:off x="658368" y="1691640"/>
-            <a:ext cx="10881360" cy="1920240"/>
-          </a:xfrm>
-          <a:prstGeom prst="roundRect">
-            <a:avLst>
-              <a:gd name="adj" fmla="val 4500"/>
-            </a:avLst>
-          </a:prstGeom>
-          <a:solidFill>
-            <a:srgbClr val="E5F5FB"/>
-          </a:solidFill>
-          <a:ln>
-            <a:noFill/>
-          </a:ln>
-          <a:effectLst/>
-        </p:spPr>
-        <p:style>
-          <a:lnRef idx="1">
-            <a:schemeClr val="accent1"/>
-          </a:lnRef>
-          <a:fillRef idx="3">
-            <a:schemeClr val="accent1"/>
-          </a:fillRef>
-          <a:effectRef idx="2">
-            <a:schemeClr val="accent1"/>
-          </a:effectRef>
-          <a:fontRef idx="minor">
-            <a:schemeClr val="lt1"/>
-          </a:fontRef>
-        </p:style>
-        <p:txBody>
-          <a:bodyPr rtlCol="0" anchor="ctr"/>
-          <a:lstStyle/>
-          <a:p>
-            <a:pPr algn="ctr"/>
-          </a:p>
-        </p:txBody>
-      </p:sp>
-      <p:sp>
-        <p:nvSpPr>
-          <p:cNvPr id="9" name="TextBox 8"/>
-          <p:cNvSpPr txBox="1"/>
-          <p:nvPr/>
-        </p:nvSpPr>
-        <p:spPr>
-          <a:xfrm>
-            <a:off x="868680" y="1874520"/>
-            <a:ext cx="2286000" cy="365760"/>
-          </a:xfrm>
-          <a:prstGeom prst="rect">
-            <a:avLst/>
-          </a:prstGeom>
-          <a:noFill/>
-        </p:spPr>
-        <p:txBody>
-          <a:bodyPr wrap="square">
-            <a:spAutoFit/>
+          <a:bodyPr rtlCol="0" anchor="ctr" wrap="square" lIns="228600" rIns="228600" tIns="109728" bIns="109728">
+            <a:noAutofit/>
           </a:bodyPr>
           <a:lstStyle/>
           <a:p>
-            <a:r>
-              <a:rPr sz="1100" b="1" i="0">
+            <a:pPr algn="l">
+              <a:spcAft>
+                <a:spcPts val="400"/>
+              </a:spcAft>
+            </a:pPr>
+            <a:r>
+              <a:rPr sz="1800" b="1" i="0">
                 <a:solidFill>
                   <a:srgbClr val="006E96"/>
                 </a:solidFill>
                 <a:latin typeface="Arial"/>
               </a:rPr>
-              <a:t>HOW IT FADES</a:t>
-            </a:r>
-          </a:p>
-        </p:txBody>
-      </p:sp>
-      <p:sp>
-        <p:nvSpPr>
-          <p:cNvPr id="10" name="TextBox 9"/>
-          <p:cNvSpPr txBox="1"/>
-          <p:nvPr/>
-        </p:nvSpPr>
-        <p:spPr>
-          <a:xfrm>
-            <a:off x="3200400" y="1847088"/>
-            <a:ext cx="8092440" cy="1600200"/>
-          </a:xfrm>
-          <a:prstGeom prst="rect">
-            <a:avLst/>
-          </a:prstGeom>
-          <a:noFill/>
-        </p:spPr>
-        <p:txBody>
-          <a:bodyPr wrap="square">
-            <a:spAutoFit/>
-          </a:bodyPr>
-          <a:lstStyle/>
-          <a:p>
-            <a:r>
-              <a:rPr sz="1800" b="0" i="0">
+              <a:t>Do this on your own sector. </a:t>
+            </a:r>
+            <a:r>
+              <a:rPr sz="1800" b="1" i="0">
                 <a:solidFill>
                   <a:srgbClr val="1A1A1A"/>
                 </a:solidFill>
                 <a:latin typeface="Arial"/>
               </a:rPr>
-              <a:t>The minister or the digitalisation officer who championed the EA moves on. The successor has their own priorities and no attachment to this one.</a:t>
-            </a:r>
-          </a:p>
-        </p:txBody>
-      </p:sp>
-      <p:sp>
-        <p:nvSpPr>
-          <p:cNvPr id="11" name="Rounded Rectangle 10"/>
-          <p:cNvSpPr/>
-          <p:nvPr/>
-        </p:nvSpPr>
-        <p:spPr>
-          <a:xfrm>
-            <a:off x="658368" y="3931920"/>
-            <a:ext cx="10881360" cy="1920240"/>
-          </a:xfrm>
-          <a:prstGeom prst="roundRect">
-            <a:avLst>
-              <a:gd name="adj" fmla="val 4500"/>
-            </a:avLst>
-          </a:prstGeom>
-          <a:solidFill>
-            <a:srgbClr val="009CD6"/>
-          </a:solidFill>
-          <a:ln>
-            <a:noFill/>
-          </a:ln>
-          <a:effectLst/>
-        </p:spPr>
-        <p:style>
-          <a:lnRef idx="1">
-            <a:schemeClr val="accent1"/>
-          </a:lnRef>
-          <a:fillRef idx="3">
-            <a:schemeClr val="accent1"/>
-          </a:fillRef>
-          <a:effectRef idx="2">
-            <a:schemeClr val="accent1"/>
-          </a:effectRef>
-          <a:fontRef idx="minor">
-            <a:schemeClr val="lt1"/>
-          </a:fontRef>
-        </p:style>
-        <p:txBody>
-          <a:bodyPr rtlCol="0" anchor="ctr"/>
-          <a:lstStyle/>
-          <a:p>
-            <a:pPr algn="ctr"/>
-          </a:p>
-        </p:txBody>
-      </p:sp>
-      <p:sp>
-        <p:nvSpPr>
-          <p:cNvPr id="12" name="TextBox 11"/>
-          <p:cNvSpPr txBox="1"/>
-          <p:nvPr/>
-        </p:nvSpPr>
-        <p:spPr>
-          <a:xfrm>
-            <a:off x="868680" y="4114800"/>
-            <a:ext cx="2286000" cy="365760"/>
-          </a:xfrm>
-          <a:prstGeom prst="rect">
-            <a:avLst/>
-          </a:prstGeom>
-          <a:noFill/>
-        </p:spPr>
-        <p:txBody>
-          <a:bodyPr wrap="square">
-            <a:spAutoFit/>
-          </a:bodyPr>
-          <a:lstStyle/>
-          <a:p>
-            <a:r>
-              <a:rPr sz="1100" b="1" i="0">
+              <a:t>Build your EA sustainment risk register.</a:t>
+            </a:r>
+          </a:p>
+          <a:p>
+            <a:pPr algn="l">
+              <a:spcAft>
+                <a:spcPts val="400"/>
+              </a:spcAft>
+            </a:pPr>
+            <a:r>
+              <a:rPr sz="1800" b="0" i="0">
                 <a:solidFill>
-                  <a:srgbClr val="FFFFFF"/>
+                  <a:srgbClr val="595959"/>
                 </a:solidFill>
                 <a:latin typeface="Arial"/>
               </a:rPr>
-              <a:t>THE COUNTER</a:t>
-            </a:r>
-          </a:p>
-        </p:txBody>
-      </p:sp>
-      <p:sp>
-        <p:nvSpPr>
-          <p:cNvPr id="13" name="TextBox 12"/>
-          <p:cNvSpPr txBox="1"/>
-          <p:nvPr/>
-        </p:nvSpPr>
-        <p:spPr>
-          <a:xfrm>
-            <a:off x="3200400" y="4087368"/>
-            <a:ext cx="8092440" cy="1600200"/>
-          </a:xfrm>
-          <a:prstGeom prst="rect">
-            <a:avLst/>
-          </a:prstGeom>
-          <a:noFill/>
-        </p:spPr>
-        <p:txBody>
-          <a:bodyPr wrap="square">
-            <a:spAutoFit/>
-          </a:bodyPr>
-          <a:lstStyle/>
-          <a:p>
-            <a:r>
-              <a:rPr sz="1800" b="0" i="0">
-                <a:solidFill>
-                  <a:srgbClr val="FFFFFF"/>
-                </a:solidFill>
-                <a:latin typeface="Arial"/>
-              </a:rPr>
-              <a:t>Institutionalise it: a legal mandate for the Board, not just a memo. A budget line, not an annual favour. And the one-page scorecard, so a new sponsor can see in five minutes that the EA is returning its cost.</a:t>
-            </a:r>
-          </a:p>
-        </p:txBody>
-      </p:sp>
-      <p:sp>
-        <p:nvSpPr>
-          <p:cNvPr id="14" name="TextBox 13"/>
+              <a:t>The prompt in the companion material gives you a four-row sustainment risk register plus early-warning signals. Before the next video.</a:t>
+            </a:r>
+          </a:p>
+        </p:txBody>
+      </p:sp>
+      <p:sp>
+        <p:nvSpPr>
+          <p:cNvPr id="5" name="TextBox 4"/>
           <p:cNvSpPr txBox="1"/>
           <p:nvPr/>
         </p:nvSpPr>
@@ -14668,6 +14715,41 @@
                 <a:latin typeface="Arial"/>
               </a:rPr>
               <a:t>3.7 · Keep the practice alive past year two</a:t>
+            </a:r>
+          </a:p>
+        </p:txBody>
+      </p:sp>
+      <p:sp>
+        <p:nvSpPr>
+          <p:cNvPr id="6" name="TextBox 5"/>
+          <p:cNvSpPr txBox="1"/>
+          <p:nvPr/>
+        </p:nvSpPr>
+        <p:spPr>
+          <a:xfrm>
+            <a:off x="10058400" y="6473952"/>
+            <a:ext cx="1673352" cy="292608"/>
+          </a:xfrm>
+          <a:prstGeom prst="rect">
+            <a:avLst/>
+          </a:prstGeom>
+          <a:noFill/>
+        </p:spPr>
+        <p:txBody>
+          <a:bodyPr wrap="square">
+            <a:spAutoFit/>
+          </a:bodyPr>
+          <a:lstStyle/>
+          <a:p>
+            <a:pPr algn="r"/>
+            <a:r>
+              <a:rPr sz="900" b="0" i="0">
+                <a:solidFill>
+                  <a:srgbClr val="595959"/>
+                </a:solidFill>
+                <a:latin typeface="Arial"/>
+              </a:rPr>
+              <a:t>www.itu.int</a:t>
             </a:r>
           </a:p>
         </p:txBody>
@@ -14680,520 +14762,7 @@
 </p:sld>
 </file>
 
-<file path=ppt/slides/slide53.xml><?xml version="1.0" encoding="utf-8"?>
-<p:sld xmlns:a="http://schemas.openxmlformats.org/drawingml/2006/main" xmlns:p="http://schemas.openxmlformats.org/presentationml/2006/main" xmlns:r="http://schemas.openxmlformats.org/officeDocument/2006/relationships">
-  <p:cSld>
-    <p:spTree>
-      <p:nvGrpSpPr>
-        <p:cNvPr id="1" name=""/>
-        <p:cNvGrpSpPr/>
-        <p:nvPr/>
-      </p:nvGrpSpPr>
-      <p:grpSpPr/>
-      <p:sp>
-        <p:nvSpPr>
-          <p:cNvPr id="2" name="Rectangle 1"/>
-          <p:cNvSpPr/>
-          <p:nvPr/>
-        </p:nvSpPr>
-        <p:spPr>
-          <a:xfrm>
-            <a:off x="457200" y="384048"/>
-            <a:ext cx="45720" cy="256032"/>
-          </a:xfrm>
-          <a:prstGeom prst="rect">
-            <a:avLst/>
-          </a:prstGeom>
-          <a:solidFill>
-            <a:srgbClr val="009CD6"/>
-          </a:solidFill>
-          <a:ln>
-            <a:noFill/>
-          </a:ln>
-          <a:effectLst/>
-        </p:spPr>
-        <p:style>
-          <a:lnRef idx="1">
-            <a:schemeClr val="accent1"/>
-          </a:lnRef>
-          <a:fillRef idx="3">
-            <a:schemeClr val="accent1"/>
-          </a:fillRef>
-          <a:effectRef idx="2">
-            <a:schemeClr val="accent1"/>
-          </a:effectRef>
-          <a:fontRef idx="minor">
-            <a:schemeClr val="lt1"/>
-          </a:fontRef>
-        </p:style>
-        <p:txBody>
-          <a:bodyPr rtlCol="0" anchor="ctr"/>
-          <a:lstStyle/>
-          <a:p>
-            <a:pPr algn="ctr"/>
-          </a:p>
-        </p:txBody>
-      </p:sp>
-      <p:sp>
-        <p:nvSpPr>
-          <p:cNvPr id="3" name="TextBox 2"/>
-          <p:cNvSpPr txBox="1"/>
-          <p:nvPr/>
-        </p:nvSpPr>
-        <p:spPr>
-          <a:xfrm>
-            <a:off x="621792" y="274320"/>
-            <a:ext cx="11247120" cy="914400"/>
-          </a:xfrm>
-          <a:prstGeom prst="rect">
-            <a:avLst/>
-          </a:prstGeom>
-          <a:noFill/>
-        </p:spPr>
-        <p:txBody>
-          <a:bodyPr wrap="square">
-            <a:spAutoFit/>
-          </a:bodyPr>
-          <a:lstStyle/>
-          <a:p>
-            <a:r>
-              <a:rPr sz="2800" b="1" i="0">
-                <a:solidFill>
-                  <a:srgbClr val="1A1A1A"/>
-                </a:solidFill>
-                <a:latin typeface="Arial"/>
-              </a:rPr>
-              <a:t>You are building something designed to outlast you</a:t>
-            </a:r>
-          </a:p>
-        </p:txBody>
-      </p:sp>
-      <p:sp>
-        <p:nvSpPr>
-          <p:cNvPr id="4" name="TextBox 3"/>
-          <p:cNvSpPr txBox="1"/>
-          <p:nvPr/>
-        </p:nvSpPr>
-        <p:spPr>
-          <a:xfrm>
-            <a:off x="658368" y="1600200"/>
-            <a:ext cx="10881360" cy="2651760"/>
-          </a:xfrm>
-          <a:prstGeom prst="rect">
-            <a:avLst/>
-          </a:prstGeom>
-          <a:noFill/>
-        </p:spPr>
-        <p:txBody>
-          <a:bodyPr wrap="square">
-            <a:spAutoFit/>
-          </a:bodyPr>
-          <a:lstStyle/>
-          <a:p>
-            <a:pPr>
-              <a:spcAft>
-                <a:spcPts val="1200"/>
-              </a:spcAft>
-            </a:pPr>
-            <a:r>
-              <a:rPr sz="2000" b="0" i="0">
-                <a:solidFill>
-                  <a:srgbClr val="1A1A1A"/>
-                </a:solidFill>
-                <a:latin typeface="Arial"/>
-              </a:rPr>
-              <a:t>A mature EA practice takes about five years. The architect who stands it up is rarely the one who sees it mature. That is not a reason for discouragement — it is the job.</a:t>
-            </a:r>
-          </a:p>
-          <a:p>
-            <a:pPr>
-              <a:spcAft>
-                <a:spcPts val="1200"/>
-              </a:spcAft>
-            </a:pPr>
-            <a:r>
-              <a:rPr sz="2000" b="0" i="0">
-                <a:solidFill>
-                  <a:srgbClr val="1A1A1A"/>
-                </a:solidFill>
-                <a:latin typeface="Arial"/>
-              </a:rPr>
-              <a:t>A repository that stays true without you. A Board that holds without you. A mandate that survives the next election.</a:t>
-            </a:r>
-          </a:p>
-        </p:txBody>
-      </p:sp>
-      <p:sp>
-        <p:nvSpPr>
-          <p:cNvPr id="5" name="Rounded Rectangle 4"/>
-          <p:cNvSpPr/>
-          <p:nvPr/>
-        </p:nvSpPr>
-        <p:spPr>
-          <a:xfrm>
-            <a:off x="658368" y="4434840"/>
-            <a:ext cx="10881360" cy="1325880"/>
-          </a:xfrm>
-          <a:prstGeom prst="roundRect">
-            <a:avLst>
-              <a:gd name="adj" fmla="val 4500"/>
-            </a:avLst>
-          </a:prstGeom>
-          <a:solidFill>
-            <a:srgbClr val="E5F5FB"/>
-          </a:solidFill>
-          <a:ln>
-            <a:noFill/>
-          </a:ln>
-          <a:effectLst/>
-        </p:spPr>
-        <p:style>
-          <a:lnRef idx="1">
-            <a:schemeClr val="accent1"/>
-          </a:lnRef>
-          <a:fillRef idx="3">
-            <a:schemeClr val="accent1"/>
-          </a:fillRef>
-          <a:effectRef idx="2">
-            <a:schemeClr val="accent1"/>
-          </a:effectRef>
-          <a:fontRef idx="minor">
-            <a:schemeClr val="lt1"/>
-          </a:fontRef>
-        </p:style>
-        <p:txBody>
-          <a:bodyPr rtlCol="0" anchor="ctr"/>
-          <a:lstStyle/>
-          <a:p>
-            <a:pPr algn="ctr"/>
-          </a:p>
-        </p:txBody>
-      </p:sp>
-      <p:sp>
-        <p:nvSpPr>
-          <p:cNvPr id="6" name="TextBox 5"/>
-          <p:cNvSpPr txBox="1"/>
-          <p:nvPr/>
-        </p:nvSpPr>
-        <p:spPr>
-          <a:xfrm>
-            <a:off x="859536" y="4626864"/>
-            <a:ext cx="10479024" cy="1051560"/>
-          </a:xfrm>
-          <a:prstGeom prst="rect">
-            <a:avLst/>
-          </a:prstGeom>
-          <a:noFill/>
-        </p:spPr>
-        <p:txBody>
-          <a:bodyPr wrap="square">
-            <a:spAutoFit/>
-          </a:bodyPr>
-          <a:lstStyle/>
-          <a:p>
-            <a:pPr>
-              <a:spcAft>
-                <a:spcPts val="700"/>
-              </a:spcAft>
-            </a:pPr>
-            <a:r>
-              <a:rPr sz="2300" b="1" i="0">
-                <a:solidFill>
-                  <a:srgbClr val="006E96"/>
-                </a:solidFill>
-                <a:latin typeface="Arial"/>
-              </a:rPr>
-              <a:t>Build it to survive you, and you have done the work.</a:t>
-            </a:r>
-          </a:p>
-        </p:txBody>
-      </p:sp>
-      <p:sp>
-        <p:nvSpPr>
-          <p:cNvPr id="7" name="TextBox 6"/>
-          <p:cNvSpPr txBox="1"/>
-          <p:nvPr/>
-        </p:nvSpPr>
-        <p:spPr>
-          <a:xfrm>
-            <a:off x="457200" y="6473952"/>
-            <a:ext cx="7772400" cy="292608"/>
-          </a:xfrm>
-          <a:prstGeom prst="rect">
-            <a:avLst/>
-          </a:prstGeom>
-          <a:noFill/>
-        </p:spPr>
-        <p:txBody>
-          <a:bodyPr wrap="square">
-            <a:spAutoFit/>
-          </a:bodyPr>
-          <a:lstStyle/>
-          <a:p>
-            <a:r>
-              <a:rPr sz="900" b="0" i="0">
-                <a:solidFill>
-                  <a:srgbClr val="595959"/>
-                </a:solidFill>
-                <a:latin typeface="Arial"/>
-              </a:rPr>
-              <a:t>3.7 · Keep the practice alive past year two</a:t>
-            </a:r>
-          </a:p>
-        </p:txBody>
-      </p:sp>
-    </p:spTree>
-  </p:cSld>
-  <p:clrMapOvr>
-    <a:masterClrMapping/>
-  </p:clrMapOvr>
-</p:sld>
-</file>
-
-<file path=ppt/slides/slide54.xml><?xml version="1.0" encoding="utf-8"?>
-<p:sld xmlns:a="http://schemas.openxmlformats.org/drawingml/2006/main" xmlns:p="http://schemas.openxmlformats.org/presentationml/2006/main" xmlns:r="http://schemas.openxmlformats.org/officeDocument/2006/relationships">
-  <p:cSld>
-    <p:spTree>
-      <p:nvGrpSpPr>
-        <p:cNvPr id="1" name=""/>
-        <p:cNvGrpSpPr/>
-        <p:nvPr/>
-      </p:nvGrpSpPr>
-      <p:grpSpPr/>
-      <p:sp>
-        <p:nvSpPr>
-          <p:cNvPr id="2" name="TextBox 1"/>
-          <p:cNvSpPr txBox="1"/>
-          <p:nvPr/>
-        </p:nvSpPr>
-        <p:spPr>
-          <a:xfrm>
-            <a:off x="1005840" y="2103120"/>
-            <a:ext cx="10149840" cy="2377440"/>
-          </a:xfrm>
-          <a:prstGeom prst="rect">
-            <a:avLst/>
-          </a:prstGeom>
-          <a:noFill/>
-        </p:spPr>
-        <p:txBody>
-          <a:bodyPr wrap="square">
-            <a:spAutoFit/>
-          </a:bodyPr>
-          <a:lstStyle/>
-          <a:p>
-            <a:r>
-              <a:rPr sz="3000" b="1" i="0">
-                <a:solidFill>
-                  <a:srgbClr val="1A1A1A"/>
-                </a:solidFill>
-                <a:latin typeface="Arial"/>
-              </a:rPr>
-              <a:t>EA programmes fade in four ways — team pulled, repository stale, Board gone advisory, sponsor changed — and you counter each by institutionalising the practice so it survives you.</a:t>
-            </a:r>
-          </a:p>
-        </p:txBody>
-      </p:sp>
-      <p:sp>
-        <p:nvSpPr>
-          <p:cNvPr id="3" name="TextBox 2"/>
-          <p:cNvSpPr txBox="1"/>
-          <p:nvPr/>
-        </p:nvSpPr>
-        <p:spPr>
-          <a:xfrm>
-            <a:off x="1005840" y="1554480"/>
-            <a:ext cx="5486400" cy="365760"/>
-          </a:xfrm>
-          <a:prstGeom prst="rect">
-            <a:avLst/>
-          </a:prstGeom>
-          <a:noFill/>
-        </p:spPr>
-        <p:txBody>
-          <a:bodyPr wrap="square">
-            <a:spAutoFit/>
-          </a:bodyPr>
-          <a:lstStyle/>
-          <a:p>
-            <a:r>
-              <a:rPr sz="1200" b="1" i="0">
-                <a:solidFill>
-                  <a:srgbClr val="006E96"/>
-                </a:solidFill>
-                <a:latin typeface="Arial"/>
-              </a:rPr>
-              <a:t>IN ONE SENTENCE</a:t>
-            </a:r>
-          </a:p>
-        </p:txBody>
-      </p:sp>
-      <p:sp>
-        <p:nvSpPr>
-          <p:cNvPr id="4" name="Rounded Rectangle 3"/>
-          <p:cNvSpPr/>
-          <p:nvPr/>
-        </p:nvSpPr>
-        <p:spPr>
-          <a:xfrm>
-            <a:off x="658368" y="4709160"/>
-            <a:ext cx="10881360" cy="1554480"/>
-          </a:xfrm>
-          <a:prstGeom prst="roundRect">
-            <a:avLst>
-              <a:gd name="adj" fmla="val 4500"/>
-            </a:avLst>
-          </a:prstGeom>
-          <a:solidFill>
-            <a:srgbClr val="FFFFFF"/>
-          </a:solidFill>
-          <a:ln w="9525">
-            <a:solidFill>
-              <a:srgbClr val="009CD6"/>
-            </a:solidFill>
-          </a:ln>
-          <a:effectLst/>
-        </p:spPr>
-        <p:style>
-          <a:lnRef idx="1">
-            <a:schemeClr val="accent1"/>
-          </a:lnRef>
-          <a:fillRef idx="3">
-            <a:schemeClr val="accent1"/>
-          </a:fillRef>
-          <a:effectRef idx="2">
-            <a:schemeClr val="accent1"/>
-          </a:effectRef>
-          <a:fontRef idx="minor">
-            <a:schemeClr val="lt1"/>
-          </a:fontRef>
-        </p:style>
-        <p:txBody>
-          <a:bodyPr rtlCol="0" anchor="ctr" wrap="square" lIns="228600" rIns="228600" tIns="109728" bIns="109728">
-            <a:noAutofit/>
-          </a:bodyPr>
-          <a:lstStyle/>
-          <a:p>
-            <a:pPr algn="l">
-              <a:spcAft>
-                <a:spcPts val="400"/>
-              </a:spcAft>
-            </a:pPr>
-            <a:r>
-              <a:rPr sz="1800" b="1" i="0">
-                <a:solidFill>
-                  <a:srgbClr val="006E96"/>
-                </a:solidFill>
-                <a:latin typeface="Arial"/>
-              </a:rPr>
-              <a:t>Do this on your own sector. </a:t>
-            </a:r>
-            <a:r>
-              <a:rPr sz="1800" b="1" i="0">
-                <a:solidFill>
-                  <a:srgbClr val="1A1A1A"/>
-                </a:solidFill>
-                <a:latin typeface="Arial"/>
-              </a:rPr>
-              <a:t>Build your EA sustainment risk register.</a:t>
-            </a:r>
-          </a:p>
-          <a:p>
-            <a:pPr algn="l">
-              <a:spcAft>
-                <a:spcPts val="400"/>
-              </a:spcAft>
-            </a:pPr>
-            <a:r>
-              <a:rPr sz="1800" b="0" i="0">
-                <a:solidFill>
-                  <a:srgbClr val="595959"/>
-                </a:solidFill>
-                <a:latin typeface="Arial"/>
-              </a:rPr>
-              <a:t>The prompt in the companion material gives you a four-row sustainment risk register plus early-warning signals. Before the next video.</a:t>
-            </a:r>
-          </a:p>
-        </p:txBody>
-      </p:sp>
-      <p:sp>
-        <p:nvSpPr>
-          <p:cNvPr id="5" name="TextBox 4"/>
-          <p:cNvSpPr txBox="1"/>
-          <p:nvPr/>
-        </p:nvSpPr>
-        <p:spPr>
-          <a:xfrm>
-            <a:off x="457200" y="6473952"/>
-            <a:ext cx="7772400" cy="292608"/>
-          </a:xfrm>
-          <a:prstGeom prst="rect">
-            <a:avLst/>
-          </a:prstGeom>
-          <a:noFill/>
-        </p:spPr>
-        <p:txBody>
-          <a:bodyPr wrap="square">
-            <a:spAutoFit/>
-          </a:bodyPr>
-          <a:lstStyle/>
-          <a:p>
-            <a:r>
-              <a:rPr sz="900" b="0" i="0">
-                <a:solidFill>
-                  <a:srgbClr val="595959"/>
-                </a:solidFill>
-                <a:latin typeface="Arial"/>
-              </a:rPr>
-              <a:t>3.7 · Keep the practice alive past year two</a:t>
-            </a:r>
-          </a:p>
-        </p:txBody>
-      </p:sp>
-      <p:sp>
-        <p:nvSpPr>
-          <p:cNvPr id="6" name="TextBox 5"/>
-          <p:cNvSpPr txBox="1"/>
-          <p:nvPr/>
-        </p:nvSpPr>
-        <p:spPr>
-          <a:xfrm>
-            <a:off x="10058400" y="6473952"/>
-            <a:ext cx="1673352" cy="292608"/>
-          </a:xfrm>
-          <a:prstGeom prst="rect">
-            <a:avLst/>
-          </a:prstGeom>
-          <a:noFill/>
-        </p:spPr>
-        <p:txBody>
-          <a:bodyPr wrap="square">
-            <a:spAutoFit/>
-          </a:bodyPr>
-          <a:lstStyle/>
-          <a:p>
-            <a:pPr algn="r"/>
-            <a:r>
-              <a:rPr sz="900" b="0" i="0">
-                <a:solidFill>
-                  <a:srgbClr val="595959"/>
-                </a:solidFill>
-                <a:latin typeface="Arial"/>
-              </a:rPr>
-              <a:t>www.itu.int</a:t>
-            </a:r>
-          </a:p>
-        </p:txBody>
-      </p:sp>
-    </p:spTree>
-  </p:cSld>
-  <p:clrMapOvr>
-    <a:masterClrMapping/>
-  </p:clrMapOvr>
-</p:sld>
-</file>
-
-<file path=ppt/slides/slide55.xml><?xml version="1.0" encoding="utf-8"?>
+<file path=ppt/slides/slide62.xml><?xml version="1.0" encoding="utf-8"?>
 <p:sld xmlns:a="http://schemas.openxmlformats.org/drawingml/2006/main" xmlns:p="http://schemas.openxmlformats.org/presentationml/2006/main" xmlns:r="http://schemas.openxmlformats.org/officeDocument/2006/relationships">
   <p:cSld>
     <p:spTree>

--- a/10-Knowledge-Products/KP1-GEA/videos/module_3/en/decks/KP1_M3_3.7_Deck_v0.2.pptx
+++ b/10-Knowledge-Products/KP1-GEA/videos/module_3/en/decks/KP1_M3_3.7_Deck_v0.2.pptx
@@ -11842,7 +11842,7 @@
                 </a:solidFill>
                 <a:latin typeface="Arial"/>
               </a:rPr>
-              <a:t>~5 minutes · standalone video · voice-over on text slides</a:t>
+              <a:t>standalone video · voice-over on text slides</a:t>
             </a:r>
           </a:p>
         </p:txBody>

--- a/10-Knowledge-Products/KP1-GEA/videos/module_3/en/decks/KP1_M3_3.7_Deck_v0.2.pptx
+++ b/10-Knowledge-Products/KP1-GEA/videos/module_3/en/decks/KP1_M3_3.7_Deck_v0.2.pptx
@@ -11706,7 +11706,7 @@
                 </a:solidFill>
                 <a:latin typeface="Arial"/>
               </a:rPr>
-              <a:t>KP1 · MODULE 3 · VIDEO 3.7</a:t>
+              <a:t>MODULE 3 · VIDEO 3.7</a:t>
             </a:r>
           </a:p>
         </p:txBody>
